--- a/Презентація_звіт_з_практики.pptx
+++ b/Презентація_звіт_з_практики.pptx
@@ -3140,33 +3140,160 @@
           </a:p>
         </p:txBody>
       </p:sp>
-      <p:pic>
-        <p:nvPicPr>
-          <p:cNvPr id="3" name="Picture 2" descr="title.png"/>
-          <p:cNvPicPr>
-            <a:picLocks noChangeAspect="1"/>
-          </p:cNvPicPr>
-          <p:nvPr/>
-        </p:nvPicPr>
-        <p:blipFill>
-          <a:blip r:embed="rId2"/>
-          <a:stretch>
-            <a:fillRect/>
-          </a:stretch>
-        </p:blipFill>
-        <p:spPr>
-          <a:xfrm>
-            <a:off x="7589520" y="1371600"/>
-            <a:ext cx="6172200" cy="4114800"/>
-          </a:xfrm>
-          <a:prstGeom prst="rect">
-            <a:avLst/>
-          </a:prstGeom>
-        </p:spPr>
-      </p:pic>
-      <p:sp>
-        <p:nvSpPr>
-          <p:cNvPr id="4" name="TextBox 3"/>
+      <p:sp>
+        <p:nvSpPr>
+          <p:cNvPr id="3" name="Rectangle 2"/>
+          <p:cNvSpPr/>
+          <p:nvPr/>
+        </p:nvSpPr>
+        <p:spPr>
+          <a:xfrm>
+            <a:off x="7315200" y="1371600"/>
+            <a:ext cx="4389120" cy="4389120"/>
+          </a:xfrm>
+          <a:prstGeom prst="rect">
+            <a:avLst/>
+          </a:prstGeom>
+          <a:solidFill>
+            <a:srgbClr val="F4F6F9"/>
+          </a:solidFill>
+          <a:ln w="19050">
+            <a:solidFill>
+              <a:srgbClr val="B0B8C4"/>
+            </a:solidFill>
+            <a:prstDash val="lgDash"/>
+          </a:ln>
+        </p:spPr>
+        <p:style>
+          <a:lnRef idx="1">
+            <a:schemeClr val="accent1"/>
+          </a:lnRef>
+          <a:fillRef idx="3">
+            <a:schemeClr val="accent1"/>
+          </a:fillRef>
+          <a:effectRef idx="2">
+            <a:schemeClr val="accent1"/>
+          </a:effectRef>
+          <a:fontRef idx="minor">
+            <a:schemeClr val="lt1"/>
+          </a:fontRef>
+        </p:style>
+        <p:txBody>
+          <a:bodyPr rtlCol="0" anchor="ctr"/>
+          <a:lstStyle/>
+          <a:p>
+            <a:pPr algn="ctr"/>
+          </a:p>
+        </p:txBody>
+      </p:sp>
+      <p:cxnSp>
+        <p:nvCxnSpPr>
+          <p:cNvPr id="4" name="Connector 3"/>
+          <p:cNvCxnSpPr/>
+          <p:nvPr/>
+        </p:nvCxnSpPr>
+        <p:spPr>
+          <a:xfrm>
+            <a:off x="7315200" y="1371600"/>
+            <a:ext cx="4389120" cy="4389120"/>
+          </a:xfrm>
+          <a:prstGeom prst="line">
+            <a:avLst/>
+          </a:prstGeom>
+          <a:ln w="9525">
+            <a:solidFill>
+              <a:srgbClr val="B0B8C4"/>
+            </a:solidFill>
+          </a:ln>
+        </p:spPr>
+        <p:style>
+          <a:lnRef idx="2">
+            <a:schemeClr val="accent1"/>
+          </a:lnRef>
+          <a:fillRef idx="0">
+            <a:schemeClr val="accent1"/>
+          </a:fillRef>
+          <a:effectRef idx="1">
+            <a:schemeClr val="accent1"/>
+          </a:effectRef>
+          <a:fontRef idx="minor">
+            <a:schemeClr val="tx1"/>
+          </a:fontRef>
+        </p:style>
+      </p:cxnSp>
+      <p:cxnSp>
+        <p:nvCxnSpPr>
+          <p:cNvPr id="5" name="Connector 4"/>
+          <p:cNvCxnSpPr/>
+          <p:nvPr/>
+        </p:nvCxnSpPr>
+        <p:spPr>
+          <a:xfrm flipH="1">
+            <a:off x="7315200" y="1371600"/>
+            <a:ext cx="4389120" cy="4389120"/>
+          </a:xfrm>
+          <a:prstGeom prst="line">
+            <a:avLst/>
+          </a:prstGeom>
+          <a:ln w="9525">
+            <a:solidFill>
+              <a:srgbClr val="B0B8C4"/>
+            </a:solidFill>
+          </a:ln>
+        </p:spPr>
+        <p:style>
+          <a:lnRef idx="2">
+            <a:schemeClr val="accent1"/>
+          </a:lnRef>
+          <a:fillRef idx="0">
+            <a:schemeClr val="accent1"/>
+          </a:fillRef>
+          <a:effectRef idx="1">
+            <a:schemeClr val="accent1"/>
+          </a:effectRef>
+          <a:fontRef idx="minor">
+            <a:schemeClr val="tx1"/>
+          </a:fontRef>
+        </p:style>
+      </p:cxnSp>
+      <p:sp>
+        <p:nvSpPr>
+          <p:cNvPr id="6" name="TextBox 5"/>
+          <p:cNvSpPr txBox="1"/>
+          <p:nvPr/>
+        </p:nvSpPr>
+        <p:spPr>
+          <a:xfrm>
+            <a:off x="7315200" y="3383280"/>
+            <a:ext cx="4389120" cy="365760"/>
+          </a:xfrm>
+          <a:prstGeom prst="rect">
+            <a:avLst/>
+          </a:prstGeom>
+          <a:noFill/>
+        </p:spPr>
+        <p:txBody>
+          <a:bodyPr wrap="square">
+            <a:spAutoFit/>
+          </a:bodyPr>
+          <a:lstStyle/>
+          <a:p>
+            <a:pPr algn="ctr"/>
+            <a:r>
+              <a:rPr sz="1400" i="1">
+                <a:solidFill>
+                  <a:srgbClr val="6C757D"/>
+                </a:solidFill>
+                <a:latin typeface="Calibri"/>
+              </a:rPr>
+              <a:t>Зображення університету / емблеми</a:t>
+            </a:r>
+          </a:p>
+        </p:txBody>
+      </p:sp>
+      <p:sp>
+        <p:nvSpPr>
+          <p:cNvPr id="7" name="TextBox 6"/>
           <p:cNvSpPr txBox="1"/>
           <p:nvPr/>
         </p:nvSpPr>
@@ -3188,7 +3315,7 @@
           <a:p>
             <a:pPr algn="l"/>
             <a:r>
-              <a:rPr sz="1400" b="0">
+              <a:rPr sz="1400" b="0" i="0">
                 <a:solidFill>
                   <a:srgbClr val="EBF2FA"/>
                 </a:solidFill>
@@ -3201,7 +3328,7 @@
       </p:sp>
       <p:sp>
         <p:nvSpPr>
-          <p:cNvPr id="5" name="TextBox 4"/>
+          <p:cNvPr id="8" name="TextBox 7"/>
           <p:cNvSpPr txBox="1"/>
           <p:nvPr/>
         </p:nvSpPr>
@@ -3223,7 +3350,7 @@
           <a:p>
             <a:pPr algn="l"/>
             <a:r>
-              <a:rPr sz="1600" b="1">
+              <a:rPr sz="1600" b="1" i="0">
                 <a:solidFill>
                   <a:srgbClr val="FFFFFF"/>
                 </a:solidFill>
@@ -3236,7 +3363,7 @@
       </p:sp>
       <p:sp>
         <p:nvSpPr>
-          <p:cNvPr id="6" name="TextBox 5"/>
+          <p:cNvPr id="9" name="TextBox 8"/>
           <p:cNvSpPr txBox="1"/>
           <p:nvPr/>
         </p:nvSpPr>
@@ -3258,27 +3385,27 @@
           <a:p>
             <a:pPr algn="l"/>
             <a:r>
-              <a:rPr sz="1300" b="0">
+              <a:rPr sz="1300" b="0" i="0">
                 <a:solidFill>
                   <a:srgbClr val="EBF2FA"/>
                 </a:solidFill>
                 <a:latin typeface="Calibri"/>
               </a:rPr>
-              <a:t>Факультет радіофізики, електроніки та комп’ютерних систем</a:t>
-            </a:r>
-          </a:p>
-        </p:txBody>
-      </p:sp>
-      <p:sp>
-        <p:nvSpPr>
-          <p:cNvPr id="7" name="TextBox 6"/>
+              <a:t>Факультет радіофізики, електроніки та комп'ютерних систем</a:t>
+            </a:r>
+          </a:p>
+        </p:txBody>
+      </p:sp>
+      <p:sp>
+        <p:nvSpPr>
+          <p:cNvPr id="10" name="TextBox 9"/>
           <p:cNvSpPr txBox="1"/>
           <p:nvPr/>
         </p:nvSpPr>
         <p:spPr>
           <a:xfrm>
-            <a:off x="548640" y="2377440"/>
-            <a:ext cx="7315200" cy="1097280"/>
+            <a:off x="548640" y="1508760"/>
+            <a:ext cx="10972800" cy="457200"/>
           </a:xfrm>
           <a:prstGeom prst="rect">
             <a:avLst/>
@@ -3293,7 +3420,42 @@
           <a:p>
             <a:pPr algn="l"/>
             <a:r>
-              <a:rPr sz="4000" b="1">
+              <a:rPr sz="1300" b="0" i="0">
+                <a:solidFill>
+                  <a:srgbClr val="EBF2FA"/>
+                </a:solidFill>
+                <a:latin typeface="Calibri"/>
+              </a:rPr>
+              <a:t>Кафедра радіотехніки та радіоелектронних систем</a:t>
+            </a:r>
+          </a:p>
+        </p:txBody>
+      </p:sp>
+      <p:sp>
+        <p:nvSpPr>
+          <p:cNvPr id="11" name="TextBox 10"/>
+          <p:cNvSpPr txBox="1"/>
+          <p:nvPr/>
+        </p:nvSpPr>
+        <p:spPr>
+          <a:xfrm>
+            <a:off x="548640" y="2377440"/>
+            <a:ext cx="7315200" cy="1097280"/>
+          </a:xfrm>
+          <a:prstGeom prst="rect">
+            <a:avLst/>
+          </a:prstGeom>
+          <a:noFill/>
+        </p:spPr>
+        <p:txBody>
+          <a:bodyPr wrap="square" lIns="0" rIns="0" tIns="0" bIns="0">
+            <a:spAutoFit/>
+          </a:bodyPr>
+          <a:lstStyle/>
+          <a:p>
+            <a:pPr algn="l"/>
+            <a:r>
+              <a:rPr sz="4000" b="1" i="0">
                 <a:solidFill>
                   <a:srgbClr val="FFFFFF"/>
                 </a:solidFill>
@@ -3305,7 +3467,7 @@
           <a:p>
             <a:pPr algn="l"/>
             <a:r>
-              <a:rPr sz="4000" b="1">
+              <a:rPr sz="4000" b="1" i="0">
                 <a:solidFill>
                   <a:srgbClr val="FFFFFF"/>
                 </a:solidFill>
@@ -3318,14 +3480,14 @@
       </p:sp>
       <p:sp>
         <p:nvSpPr>
-          <p:cNvPr id="8" name="Rectangle 7"/>
+          <p:cNvPr id="12" name="Rectangle 11"/>
           <p:cNvSpPr/>
           <p:nvPr/>
         </p:nvSpPr>
         <p:spPr>
           <a:xfrm>
-            <a:off x="548640" y="4206240"/>
-            <a:ext cx="137160" cy="1463040"/>
+            <a:off x="548640" y="4297680"/>
+            <a:ext cx="137160" cy="1554480"/>
           </a:xfrm>
           <a:prstGeom prst="rect">
             <a:avLst/>
@@ -3361,13 +3523,13 @@
       </p:sp>
       <p:sp>
         <p:nvSpPr>
-          <p:cNvPr id="9" name="TextBox 8"/>
+          <p:cNvPr id="13" name="TextBox 12"/>
           <p:cNvSpPr txBox="1"/>
           <p:nvPr/>
         </p:nvSpPr>
         <p:spPr>
           <a:xfrm>
-            <a:off x="868680" y="4206240"/>
+            <a:off x="868680" y="4297680"/>
             <a:ext cx="6400800" cy="457200"/>
           </a:xfrm>
           <a:prstGeom prst="rect">
@@ -3383,7 +3545,7 @@
           <a:p>
             <a:pPr algn="l"/>
             <a:r>
-              <a:rPr sz="1400" b="0">
+              <a:rPr sz="1400" b="0" i="0">
                 <a:solidFill>
                   <a:srgbClr val="EBF2FA"/>
                 </a:solidFill>
@@ -3396,13 +3558,13 @@
       </p:sp>
       <p:sp>
         <p:nvSpPr>
-          <p:cNvPr id="10" name="TextBox 9"/>
+          <p:cNvPr id="14" name="TextBox 13"/>
           <p:cNvSpPr txBox="1"/>
           <p:nvPr/>
         </p:nvSpPr>
         <p:spPr>
           <a:xfrm>
-            <a:off x="868680" y="4526280"/>
+            <a:off x="868680" y="4617720"/>
             <a:ext cx="6400800" cy="457200"/>
           </a:xfrm>
           <a:prstGeom prst="rect">
@@ -3418,7 +3580,7 @@
           <a:p>
             <a:pPr algn="l"/>
             <a:r>
-              <a:rPr sz="2000" b="1">
+              <a:rPr sz="2200" b="1" i="0">
                 <a:solidFill>
                   <a:srgbClr val="FFFFFF"/>
                 </a:solidFill>
@@ -3431,13 +3593,13 @@
       </p:sp>
       <p:sp>
         <p:nvSpPr>
-          <p:cNvPr id="11" name="TextBox 10"/>
+          <p:cNvPr id="15" name="TextBox 14"/>
           <p:cNvSpPr txBox="1"/>
           <p:nvPr/>
         </p:nvSpPr>
         <p:spPr>
           <a:xfrm>
-            <a:off x="868680" y="4937760"/>
+            <a:off x="868680" y="5074920"/>
             <a:ext cx="7315200" cy="457200"/>
           </a:xfrm>
           <a:prstGeom prst="rect">
@@ -3453,26 +3615,26 @@
           <a:p>
             <a:pPr algn="l"/>
             <a:r>
-              <a:rPr sz="1300" b="0">
+              <a:rPr sz="1400" b="0" i="0">
                 <a:solidFill>
                   <a:srgbClr val="EBF2FA"/>
                 </a:solidFill>
                 <a:latin typeface="Calibri"/>
               </a:rPr>
-              <a:t>Студент 4 курсу • Телекомунікації та радіотехніка</a:t>
-            </a:r>
-          </a:p>
-        </p:txBody>
-      </p:sp>
-      <p:sp>
-        <p:nvSpPr>
-          <p:cNvPr id="12" name="TextBox 11"/>
+              <a:t>Студент 4 курсу, група ПАЗТК</a:t>
+            </a:r>
+          </a:p>
+        </p:txBody>
+      </p:sp>
+      <p:sp>
+        <p:nvSpPr>
+          <p:cNvPr id="16" name="TextBox 15"/>
           <p:cNvSpPr txBox="1"/>
           <p:nvPr/>
         </p:nvSpPr>
         <p:spPr>
           <a:xfrm>
-            <a:off x="548640" y="6035040"/>
+            <a:off x="868680" y="5394960"/>
             <a:ext cx="7315200" cy="457200"/>
           </a:xfrm>
           <a:prstGeom prst="rect">
@@ -3488,27 +3650,27 @@
           <a:p>
             <a:pPr algn="l"/>
             <a:r>
-              <a:rPr sz="1200" b="0">
+              <a:rPr sz="1300" b="0" i="0">
                 <a:solidFill>
                   <a:srgbClr val="EBF2FA"/>
                 </a:solidFill>
                 <a:latin typeface="Calibri"/>
               </a:rPr>
-              <a:t>Керівники: доц. Жиров Г.Б.  •  Кольцова С.В.</a:t>
-            </a:r>
-          </a:p>
-        </p:txBody>
-      </p:sp>
-      <p:sp>
-        <p:nvSpPr>
-          <p:cNvPr id="13" name="TextBox 12"/>
+              <a:t>Спеціальність «Телекомунікації та радіотехніка»</a:t>
+            </a:r>
+          </a:p>
+        </p:txBody>
+      </p:sp>
+      <p:sp>
+        <p:nvSpPr>
+          <p:cNvPr id="17" name="TextBox 16"/>
           <p:cNvSpPr txBox="1"/>
           <p:nvPr/>
         </p:nvSpPr>
         <p:spPr>
           <a:xfrm>
-            <a:off x="10515600" y="6035040"/>
-            <a:ext cx="1828800" cy="457200"/>
+            <a:off x="548640" y="6080760"/>
+            <a:ext cx="7315200" cy="457200"/>
           </a:xfrm>
           <a:prstGeom prst="rect">
             <a:avLst/>
@@ -3523,7 +3685,42 @@
           <a:p>
             <a:pPr algn="l"/>
             <a:r>
-              <a:rPr sz="1200" b="0">
+              <a:rPr sz="1200" b="0" i="0">
+                <a:solidFill>
+                  <a:srgbClr val="EBF2FA"/>
+                </a:solidFill>
+                <a:latin typeface="Calibri"/>
+              </a:rPr>
+              <a:t>Керівники: доц. Жиров Г.Б.  •  Кольцова С.В.</a:t>
+            </a:r>
+          </a:p>
+        </p:txBody>
+      </p:sp>
+      <p:sp>
+        <p:nvSpPr>
+          <p:cNvPr id="18" name="TextBox 17"/>
+          <p:cNvSpPr txBox="1"/>
+          <p:nvPr/>
+        </p:nvSpPr>
+        <p:spPr>
+          <a:xfrm>
+            <a:off x="10332720" y="6080760"/>
+            <a:ext cx="1828800" cy="457200"/>
+          </a:xfrm>
+          <a:prstGeom prst="rect">
+            <a:avLst/>
+          </a:prstGeom>
+          <a:noFill/>
+        </p:spPr>
+        <p:txBody>
+          <a:bodyPr wrap="square" lIns="0" rIns="0" tIns="0" bIns="0">
+            <a:spAutoFit/>
+          </a:bodyPr>
+          <a:lstStyle/>
+          <a:p>
+            <a:pPr algn="l"/>
+            <a:r>
+              <a:rPr sz="1200" b="0" i="0">
                 <a:solidFill>
                   <a:srgbClr val="EBF2FA"/>
                 </a:solidFill>
@@ -3619,7 +3816,7 @@
           <a:p>
             <a:pPr algn="l"/>
             <a:r>
-              <a:rPr sz="3600" b="1">
+              <a:rPr sz="3600" b="1" i="0">
                 <a:solidFill>
                   <a:srgbClr val="FFFFFF"/>
                 </a:solidFill>
@@ -3681,8 +3878,8 @@
         </p:nvSpPr>
         <p:spPr>
           <a:xfrm>
-            <a:off x="548640" y="1463040"/>
-            <a:ext cx="7772400" cy="5029200"/>
+            <a:off x="548640" y="1417320"/>
+            <a:ext cx="7772400" cy="5120640"/>
           </a:xfrm>
           <a:prstGeom prst="rect">
             <a:avLst/>
@@ -3701,13 +3898,13 @@
               </a:spcAft>
             </a:pPr>
             <a:r>
-              <a:rPr sz="1600">
+              <a:rPr sz="1400">
                 <a:solidFill>
                   <a:srgbClr val="FFFFFF"/>
                 </a:solidFill>
                 <a:latin typeface="Calibri"/>
               </a:rPr>
-              <a:t>•  Закріплено теоретичні знання за спеціальністю 172 «Телекомунікації та радіотехніка»</a:t>
+              <a:t>•  Закріплено теоретичні знання за спеціальністю 172 «Телекомунікації та радіотехніка» та здобуто практичні навички роботи з реальною мережевою інфраструктурою.</a:t>
             </a:r>
           </a:p>
           <a:p>
@@ -3717,13 +3914,13 @@
               </a:spcAft>
             </a:pPr>
             <a:r>
-              <a:rPr sz="1600">
+              <a:rPr sz="1400">
                 <a:solidFill>
                   <a:srgbClr val="FFFFFF"/>
                 </a:solidFill>
                 <a:latin typeface="Calibri"/>
               </a:rPr>
-              <a:t>•  Здобуто практичні навички роботи з MikroTik і D-Link, налаштування VLAN та сегментації мережі</a:t>
+              <a:t>•  Отримано досвід налаштування маршрутизаторів MikroTik і керованих комутаторів D-Link, конфігурації VLAN, сегментації мережі та параметрів доступу користувачів.</a:t>
             </a:r>
           </a:p>
           <a:p>
@@ -3733,13 +3930,13 @@
               </a:spcAft>
             </a:pPr>
             <a:r>
-              <a:rPr sz="1600">
+              <a:rPr sz="1400">
                 <a:solidFill>
                   <a:srgbClr val="FFFFFF"/>
                 </a:solidFill>
                 <a:latin typeface="Calibri"/>
               </a:rPr>
-              <a:t>•  Досліджено централізоване керування доступом — модель AAA та протокол TACACS+</a:t>
+              <a:t>•  Досліджено технології централізованого керування доступом — модель AAA та протокол TACACS+, що дозволило зрозуміти принципи підвищення рівня безпеки та аудиту дій адміністраторів.</a:t>
             </a:r>
           </a:p>
           <a:p>
@@ -3749,13 +3946,13 @@
               </a:spcAft>
             </a:pPr>
             <a:r>
-              <a:rPr sz="1600">
+              <a:rPr sz="1400">
                 <a:solidFill>
                   <a:srgbClr val="FFFFFF"/>
                 </a:solidFill>
                 <a:latin typeface="Calibri"/>
               </a:rPr>
-              <a:t>•  Виконано моніторинг роботи мережі, діагностику аварійних ситуацій, оцінку навантаження</a:t>
+              <a:t>•  Виконано моніторинг роботи обладнання, діагностику аварійних ситуацій і оцінку навантаження на мережу в умовах реальної експлуатації.</a:t>
             </a:r>
           </a:p>
           <a:p>
@@ -3765,13 +3962,13 @@
               </a:spcAft>
             </a:pPr>
             <a:r>
-              <a:rPr sz="1600">
+              <a:rPr sz="1400">
                 <a:solidFill>
                   <a:srgbClr val="FFFFFF"/>
                 </a:solidFill>
                 <a:latin typeface="Calibri"/>
               </a:rPr>
-              <a:t>•  Отримано досвід командної роботи та підготовки технічної документації</a:t>
+              <a:t>•  Здобуто досвід командної роботи з технічними спеціалістами, підготовки технічної документації та аналітичних матеріалів.</a:t>
             </a:r>
           </a:p>
           <a:p>
@@ -3781,51 +3978,178 @@
               </a:spcAft>
             </a:pPr>
             <a:r>
-              <a:rPr sz="1600">
+              <a:rPr sz="1400">
                 <a:solidFill>
                   <a:srgbClr val="FFFFFF"/>
                 </a:solidFill>
                 <a:latin typeface="Calibri"/>
               </a:rPr>
-              <a:t>•  Виконано понад 2/3 професійних завдань для кваліфікації «Фахівець електронних комунікацій»</a:t>
-            </a:r>
-          </a:p>
-        </p:txBody>
-      </p:sp>
-      <p:pic>
-        <p:nvPicPr>
-          <p:cNvPr id="6" name="Picture 5" descr="conclusion.png"/>
-          <p:cNvPicPr>
-            <a:picLocks noChangeAspect="1"/>
-          </p:cNvPicPr>
-          <p:nvPr/>
-        </p:nvPicPr>
-        <p:blipFill>
-          <a:blip r:embed="rId2"/>
-          <a:stretch>
-            <a:fillRect/>
-          </a:stretch>
-        </p:blipFill>
-        <p:spPr>
-          <a:xfrm>
-            <a:off x="8503920" y="1645920"/>
-            <a:ext cx="6583680" cy="3657600"/>
-          </a:xfrm>
-          <a:prstGeom prst="rect">
-            <a:avLst/>
-          </a:prstGeom>
-        </p:spPr>
-      </p:pic>
-      <p:sp>
-        <p:nvSpPr>
-          <p:cNvPr id="7" name="TextBox 6"/>
+              <a:t>•  Підтверджено виконання понад 2/3 професійних завдань для кваліфікації «Фахівець електронних комунікацій» — програма практики виконана у повному обсязі.</a:t>
+            </a:r>
+          </a:p>
+        </p:txBody>
+      </p:sp>
+      <p:sp>
+        <p:nvSpPr>
+          <p:cNvPr id="6" name="Rectangle 5"/>
+          <p:cNvSpPr/>
+          <p:nvPr/>
+        </p:nvSpPr>
+        <p:spPr>
+          <a:xfrm>
+            <a:off x="8503920" y="1417320"/>
+            <a:ext cx="3291840" cy="3931920"/>
+          </a:xfrm>
+          <a:prstGeom prst="rect">
+            <a:avLst/>
+          </a:prstGeom>
+          <a:solidFill>
+            <a:srgbClr val="F4F6F9"/>
+          </a:solidFill>
+          <a:ln w="19050">
+            <a:solidFill>
+              <a:srgbClr val="B0B8C4"/>
+            </a:solidFill>
+            <a:prstDash val="lgDash"/>
+          </a:ln>
+        </p:spPr>
+        <p:style>
+          <a:lnRef idx="1">
+            <a:schemeClr val="accent1"/>
+          </a:lnRef>
+          <a:fillRef idx="3">
+            <a:schemeClr val="accent1"/>
+          </a:fillRef>
+          <a:effectRef idx="2">
+            <a:schemeClr val="accent1"/>
+          </a:effectRef>
+          <a:fontRef idx="minor">
+            <a:schemeClr val="lt1"/>
+          </a:fontRef>
+        </p:style>
+        <p:txBody>
+          <a:bodyPr rtlCol="0" anchor="ctr"/>
+          <a:lstStyle/>
+          <a:p>
+            <a:pPr algn="ctr"/>
+          </a:p>
+        </p:txBody>
+      </p:sp>
+      <p:cxnSp>
+        <p:nvCxnSpPr>
+          <p:cNvPr id="7" name="Connector 6"/>
+          <p:cNvCxnSpPr/>
+          <p:nvPr/>
+        </p:nvCxnSpPr>
+        <p:spPr>
+          <a:xfrm>
+            <a:off x="8503920" y="1417320"/>
+            <a:ext cx="3291840" cy="3931920"/>
+          </a:xfrm>
+          <a:prstGeom prst="line">
+            <a:avLst/>
+          </a:prstGeom>
+          <a:ln w="9525">
+            <a:solidFill>
+              <a:srgbClr val="B0B8C4"/>
+            </a:solidFill>
+          </a:ln>
+        </p:spPr>
+        <p:style>
+          <a:lnRef idx="2">
+            <a:schemeClr val="accent1"/>
+          </a:lnRef>
+          <a:fillRef idx="0">
+            <a:schemeClr val="accent1"/>
+          </a:fillRef>
+          <a:effectRef idx="1">
+            <a:schemeClr val="accent1"/>
+          </a:effectRef>
+          <a:fontRef idx="minor">
+            <a:schemeClr val="tx1"/>
+          </a:fontRef>
+        </p:style>
+      </p:cxnSp>
+      <p:cxnSp>
+        <p:nvCxnSpPr>
+          <p:cNvPr id="8" name="Connector 7"/>
+          <p:cNvCxnSpPr/>
+          <p:nvPr/>
+        </p:nvCxnSpPr>
+        <p:spPr>
+          <a:xfrm flipH="1">
+            <a:off x="8503920" y="1417320"/>
+            <a:ext cx="3291840" cy="3931920"/>
+          </a:xfrm>
+          <a:prstGeom prst="line">
+            <a:avLst/>
+          </a:prstGeom>
+          <a:ln w="9525">
+            <a:solidFill>
+              <a:srgbClr val="B0B8C4"/>
+            </a:solidFill>
+          </a:ln>
+        </p:spPr>
+        <p:style>
+          <a:lnRef idx="2">
+            <a:schemeClr val="accent1"/>
+          </a:lnRef>
+          <a:fillRef idx="0">
+            <a:schemeClr val="accent1"/>
+          </a:fillRef>
+          <a:effectRef idx="1">
+            <a:schemeClr val="accent1"/>
+          </a:effectRef>
+          <a:fontRef idx="minor">
+            <a:schemeClr val="tx1"/>
+          </a:fontRef>
+        </p:style>
+      </p:cxnSp>
+      <p:sp>
+        <p:nvSpPr>
+          <p:cNvPr id="9" name="TextBox 8"/>
           <p:cNvSpPr txBox="1"/>
           <p:nvPr/>
         </p:nvSpPr>
         <p:spPr>
           <a:xfrm>
-            <a:off x="8503920" y="5577840"/>
-            <a:ext cx="3657600" cy="457200"/>
+            <a:off x="8503920" y="3200400"/>
+            <a:ext cx="3291840" cy="365760"/>
+          </a:xfrm>
+          <a:prstGeom prst="rect">
+            <a:avLst/>
+          </a:prstGeom>
+          <a:noFill/>
+        </p:spPr>
+        <p:txBody>
+          <a:bodyPr wrap="square">
+            <a:spAutoFit/>
+          </a:bodyPr>
+          <a:lstStyle/>
+          <a:p>
+            <a:pPr algn="ctr"/>
+            <a:r>
+              <a:rPr sz="1400" i="1">
+                <a:solidFill>
+                  <a:srgbClr val="6C757D"/>
+                </a:solidFill>
+                <a:latin typeface="Calibri"/>
+              </a:rPr>
+              <a:t>Фінальне зображення</a:t>
+            </a:r>
+          </a:p>
+        </p:txBody>
+      </p:sp>
+      <p:sp>
+        <p:nvSpPr>
+          <p:cNvPr id="10" name="TextBox 9"/>
+          <p:cNvSpPr txBox="1"/>
+          <p:nvPr/>
+        </p:nvSpPr>
+        <p:spPr>
+          <a:xfrm>
+            <a:off x="8503920" y="5532120"/>
+            <a:ext cx="3291840" cy="457200"/>
           </a:xfrm>
           <a:prstGeom prst="rect">
             <a:avLst/>
@@ -3840,7 +4164,7 @@
           <a:p>
             <a:pPr algn="ctr"/>
             <a:r>
-              <a:rPr sz="2200" b="1">
+              <a:rPr sz="2200" b="1" i="0">
                 <a:solidFill>
                   <a:srgbClr val="F39C12"/>
                 </a:solidFill>
@@ -3853,14 +4177,14 @@
       </p:sp>
       <p:sp>
         <p:nvSpPr>
-          <p:cNvPr id="8" name="TextBox 7"/>
+          <p:cNvPr id="11" name="TextBox 10"/>
           <p:cNvSpPr txBox="1"/>
           <p:nvPr/>
         </p:nvSpPr>
         <p:spPr>
           <a:xfrm>
-            <a:off x="8503920" y="6035040"/>
-            <a:ext cx="3657600" cy="365760"/>
+            <a:off x="8503920" y="5989320"/>
+            <a:ext cx="3291840" cy="365760"/>
           </a:xfrm>
           <a:prstGeom prst="rect">
             <a:avLst/>
@@ -3875,13 +4199,13 @@
           <a:p>
             <a:pPr algn="ctr"/>
             <a:r>
-              <a:rPr sz="1400" b="0">
+              <a:rPr sz="1300" b="0" i="0">
                 <a:solidFill>
                   <a:srgbClr val="EBF2FA"/>
                 </a:solidFill>
                 <a:latin typeface="Calibri"/>
               </a:rPr>
-              <a:t>Готовий до питань</a:t>
+              <a:t>Готовий відповісти на питання</a:t>
             </a:r>
           </a:p>
         </p:txBody>
@@ -3998,7 +4322,7 @@
         </p:nvSpPr>
         <p:spPr>
           <a:xfrm>
-            <a:off x="457200" y="228600"/>
+            <a:off x="457200" y="201168"/>
             <a:ext cx="11247120" cy="640080"/>
           </a:xfrm>
           <a:prstGeom prst="rect">
@@ -4014,7 +4338,7 @@
           <a:p>
             <a:pPr algn="l"/>
             <a:r>
-              <a:rPr sz="2800" b="1">
+              <a:rPr sz="2800" b="1" i="0">
                 <a:solidFill>
                   <a:srgbClr val="FFFFFF"/>
                 </a:solidFill>
@@ -4033,7 +4357,7 @@
         </p:nvSpPr>
         <p:spPr>
           <a:xfrm>
-            <a:off x="457200" y="685800"/>
+            <a:off x="457200" y="713232"/>
             <a:ext cx="11247120" cy="365760"/>
           </a:xfrm>
           <a:prstGeom prst="rect">
@@ -4049,7 +4373,7 @@
           <a:p>
             <a:pPr algn="l"/>
             <a:r>
-              <a:rPr sz="1400" b="0">
+              <a:rPr sz="1300" b="0" i="1">
                 <a:solidFill>
                   <a:srgbClr val="EBF2FA"/>
                 </a:solidFill>
@@ -4062,25 +4386,144 @@
       </p:sp>
       <p:sp>
         <p:nvSpPr>
-          <p:cNvPr id="6" name="Rounded Rectangle 5"/>
+          <p:cNvPr id="6" name="TextBox 5"/>
+          <p:cNvSpPr txBox="1"/>
+          <p:nvPr/>
+        </p:nvSpPr>
+        <p:spPr>
+          <a:xfrm>
+            <a:off x="457200" y="1234440"/>
+            <a:ext cx="7772400" cy="457200"/>
+          </a:xfrm>
+          <a:prstGeom prst="rect">
+            <a:avLst/>
+          </a:prstGeom>
+          <a:noFill/>
+        </p:spPr>
+        <p:txBody>
+          <a:bodyPr wrap="square" lIns="0" rIns="0" tIns="0" bIns="0">
+            <a:spAutoFit/>
+          </a:bodyPr>
+          <a:lstStyle/>
+          <a:p>
+            <a:pPr algn="l"/>
+            <a:r>
+              <a:rPr sz="1800" b="1" i="0">
+                <a:solidFill>
+                  <a:srgbClr val="204982"/>
+                </a:solidFill>
+                <a:latin typeface="Calibri"/>
+              </a:rPr>
+              <a:t>Місце та об'єкт практики</a:t>
+            </a:r>
+          </a:p>
+        </p:txBody>
+      </p:sp>
+      <p:sp>
+        <p:nvSpPr>
+          <p:cNvPr id="7" name="TextBox 6"/>
+          <p:cNvSpPr txBox="1"/>
+          <p:nvPr/>
+        </p:nvSpPr>
+        <p:spPr>
+          <a:xfrm>
+            <a:off x="457200" y="1691640"/>
+            <a:ext cx="7772400" cy="4754880"/>
+          </a:xfrm>
+          <a:prstGeom prst="rect">
+            <a:avLst/>
+          </a:prstGeom>
+          <a:noFill/>
+        </p:spPr>
+        <p:txBody>
+          <a:bodyPr wrap="square" lIns="0" rIns="0" tIns="0" bIns="0">
+            <a:spAutoFit/>
+          </a:bodyPr>
+          <a:lstStyle/>
+          <a:p>
+            <a:pPr algn="l"/>
+            <a:r>
+              <a:rPr sz="1400" b="0" i="0">
+                <a:solidFill>
+                  <a:srgbClr val="212529"/>
+                </a:solidFill>
+                <a:latin typeface="Calibri"/>
+              </a:rPr>
+              <a:t>Я, Рева Іван Михайлович, студент 4-го курсу групи ПАЗТК факультету радіофізики, електроніки та комп'ютерних систем, проходив навчально-виробничу практику в Інформаційно-обчислювальному центрі КНУ ім. Т. Шевченка.</a:t>
+            </a:r>
+          </a:p>
+          <a:p>
+            <a:pPr algn="l"/>
+            <a:r>
+              <a:rPr sz="1400" b="0" i="0">
+                <a:solidFill>
+                  <a:srgbClr val="212529"/>
+                </a:solidFill>
+                <a:latin typeface="Calibri"/>
+              </a:rPr>
+              <a:t/>
+            </a:r>
+          </a:p>
+          <a:p>
+            <a:pPr algn="l"/>
+            <a:r>
+              <a:rPr sz="1400" b="0" i="0">
+                <a:solidFill>
+                  <a:srgbClr val="212529"/>
+                </a:solidFill>
+                <a:latin typeface="Calibri"/>
+              </a:rPr>
+              <a:t>Під час практики я ознайомився з принципами організації та функціонування локальної комп'ютерної мережі, особливостями роботи мережевого обладнання та процесами адміністрування телекомунікаційної інфраструктури гуртожитків КНУ.</a:t>
+            </a:r>
+          </a:p>
+          <a:p>
+            <a:pPr algn="l"/>
+            <a:r>
+              <a:rPr sz="1400" b="0" i="0">
+                <a:solidFill>
+                  <a:srgbClr val="212529"/>
+                </a:solidFill>
+                <a:latin typeface="Calibri"/>
+              </a:rPr>
+              <a:t/>
+            </a:r>
+          </a:p>
+          <a:p>
+            <a:pPr algn="l"/>
+            <a:r>
+              <a:rPr sz="1400" b="0" i="0">
+                <a:solidFill>
+                  <a:srgbClr val="212529"/>
+                </a:solidFill>
+                <a:latin typeface="Calibri"/>
+              </a:rPr>
+              <a:t>Мережа гуртожитків — це масштабна інфраструктура, що обслуговує сотні одночасних користувачів і має забезпечувати стабільний та безпечний доступ до Інтернету і внутрішніх ресурсів університету.</a:t>
+            </a:r>
+          </a:p>
+        </p:txBody>
+      </p:sp>
+      <p:sp>
+        <p:nvSpPr>
+          <p:cNvPr id="8" name="Rectangle 7"/>
           <p:cNvSpPr/>
           <p:nvPr/>
         </p:nvSpPr>
         <p:spPr>
           <a:xfrm>
-            <a:off x="457200" y="1280160"/>
-            <a:ext cx="5486400" cy="2468880"/>
-          </a:xfrm>
-          <a:prstGeom prst="roundRect">
+            <a:off x="8503920" y="1280160"/>
+            <a:ext cx="3291840" cy="5120640"/>
+          </a:xfrm>
+          <a:prstGeom prst="rect">
             <a:avLst/>
           </a:prstGeom>
           <a:solidFill>
-            <a:srgbClr val="EBF2FA"/>
+            <a:srgbClr val="F4F6F9"/>
           </a:solidFill>
           <a:ln w="19050">
             <a:solidFill>
-              <a:srgbClr val="204982"/>
+              <a:srgbClr val="B0B8C4"/>
             </a:solidFill>
+            <a:prstDash val="lgDash"/>
           </a:ln>
         </p:spPr>
         <p:style>
@@ -4105,16 +4548,86 @@
           </a:p>
         </p:txBody>
       </p:sp>
-      <p:sp>
-        <p:nvSpPr>
-          <p:cNvPr id="7" name="TextBox 6"/>
+      <p:cxnSp>
+        <p:nvCxnSpPr>
+          <p:cNvPr id="9" name="Connector 8"/>
+          <p:cNvCxnSpPr/>
+          <p:nvPr/>
+        </p:nvCxnSpPr>
+        <p:spPr>
+          <a:xfrm>
+            <a:off x="8503920" y="1280160"/>
+            <a:ext cx="3291840" cy="5120640"/>
+          </a:xfrm>
+          <a:prstGeom prst="line">
+            <a:avLst/>
+          </a:prstGeom>
+          <a:ln w="9525">
+            <a:solidFill>
+              <a:srgbClr val="B0B8C4"/>
+            </a:solidFill>
+          </a:ln>
+        </p:spPr>
+        <p:style>
+          <a:lnRef idx="2">
+            <a:schemeClr val="accent1"/>
+          </a:lnRef>
+          <a:fillRef idx="0">
+            <a:schemeClr val="accent1"/>
+          </a:fillRef>
+          <a:effectRef idx="1">
+            <a:schemeClr val="accent1"/>
+          </a:effectRef>
+          <a:fontRef idx="minor">
+            <a:schemeClr val="tx1"/>
+          </a:fontRef>
+        </p:style>
+      </p:cxnSp>
+      <p:cxnSp>
+        <p:nvCxnSpPr>
+          <p:cNvPr id="10" name="Connector 9"/>
+          <p:cNvCxnSpPr/>
+          <p:nvPr/>
+        </p:nvCxnSpPr>
+        <p:spPr>
+          <a:xfrm flipH="1">
+            <a:off x="8503920" y="1280160"/>
+            <a:ext cx="3291840" cy="5120640"/>
+          </a:xfrm>
+          <a:prstGeom prst="line">
+            <a:avLst/>
+          </a:prstGeom>
+          <a:ln w="9525">
+            <a:solidFill>
+              <a:srgbClr val="B0B8C4"/>
+            </a:solidFill>
+          </a:ln>
+        </p:spPr>
+        <p:style>
+          <a:lnRef idx="2">
+            <a:schemeClr val="accent1"/>
+          </a:lnRef>
+          <a:fillRef idx="0">
+            <a:schemeClr val="accent1"/>
+          </a:fillRef>
+          <a:effectRef idx="1">
+            <a:schemeClr val="accent1"/>
+          </a:effectRef>
+          <a:fontRef idx="minor">
+            <a:schemeClr val="tx1"/>
+          </a:fontRef>
+        </p:style>
+      </p:cxnSp>
+      <p:sp>
+        <p:nvSpPr>
+          <p:cNvPr id="11" name="TextBox 10"/>
           <p:cNvSpPr txBox="1"/>
           <p:nvPr/>
         </p:nvSpPr>
         <p:spPr>
           <a:xfrm>
-            <a:off x="685800" y="1417320"/>
-            <a:ext cx="5029200" cy="365760"/>
+            <a:off x="8503920" y="3657600"/>
+            <a:ext cx="3291840" cy="365760"/>
           </a:xfrm>
           <a:prstGeom prst="rect">
             <a:avLst/>
@@ -4122,400 +4635,20 @@
           <a:noFill/>
         </p:spPr>
         <p:txBody>
-          <a:bodyPr wrap="square" lIns="0" rIns="0" tIns="0" bIns="0">
+          <a:bodyPr wrap="square">
             <a:spAutoFit/>
           </a:bodyPr>
           <a:lstStyle/>
           <a:p>
-            <a:pPr algn="l"/>
-            <a:r>
-              <a:rPr sz="1500" b="1">
-                <a:solidFill>
-                  <a:srgbClr val="204982"/>
-                </a:solidFill>
-                <a:latin typeface="Calibri"/>
-              </a:rPr>
-              <a:t>Мета</a:t>
-            </a:r>
-          </a:p>
-        </p:txBody>
-      </p:sp>
-      <p:sp>
-        <p:nvSpPr>
-          <p:cNvPr id="8" name="TextBox 7"/>
-          <p:cNvSpPr txBox="1"/>
-          <p:nvPr/>
-        </p:nvSpPr>
-        <p:spPr>
-          <a:xfrm>
-            <a:off x="685800" y="1828800"/>
-            <a:ext cx="5029200" cy="1828800"/>
-          </a:xfrm>
-          <a:prstGeom prst="rect">
-            <a:avLst/>
-          </a:prstGeom>
-          <a:noFill/>
-        </p:spPr>
-        <p:txBody>
-          <a:bodyPr wrap="square" lIns="0" rIns="0" tIns="0" bIns="0">
-            <a:spAutoFit/>
-          </a:bodyPr>
-          <a:lstStyle/>
-          <a:p>
-            <a:pPr algn="l"/>
-            <a:r>
-              <a:rPr sz="1300" b="0">
-                <a:solidFill>
-                  <a:srgbClr val="212529"/>
-                </a:solidFill>
-                <a:latin typeface="Calibri"/>
-              </a:rPr>
-              <a:t>Аналіз роботи локальної телекомунікаційної мережі, дослідження принципів конфігурації мережевого обладнання та забезпечення стабільної і безпечної роботи інфраструктури.</a:t>
-            </a:r>
-          </a:p>
-        </p:txBody>
-      </p:sp>
-      <p:sp>
-        <p:nvSpPr>
-          <p:cNvPr id="9" name="Rounded Rectangle 8"/>
-          <p:cNvSpPr/>
-          <p:nvPr/>
-        </p:nvSpPr>
-        <p:spPr>
-          <a:xfrm>
-            <a:off x="6217920" y="1280160"/>
-            <a:ext cx="5486400" cy="2468880"/>
-          </a:xfrm>
-          <a:prstGeom prst="roundRect">
-            <a:avLst/>
-          </a:prstGeom>
-          <a:solidFill>
-            <a:srgbClr val="EBF2FA"/>
-          </a:solidFill>
-          <a:ln w="19050">
-            <a:solidFill>
-              <a:srgbClr val="36A2EB"/>
-            </a:solidFill>
-          </a:ln>
-        </p:spPr>
-        <p:style>
-          <a:lnRef idx="1">
-            <a:schemeClr val="accent1"/>
-          </a:lnRef>
-          <a:fillRef idx="3">
-            <a:schemeClr val="accent1"/>
-          </a:fillRef>
-          <a:effectRef idx="2">
-            <a:schemeClr val="accent1"/>
-          </a:effectRef>
-          <a:fontRef idx="minor">
-            <a:schemeClr val="lt1"/>
-          </a:fontRef>
-        </p:style>
-        <p:txBody>
-          <a:bodyPr rtlCol="0" anchor="ctr"/>
-          <a:lstStyle/>
-          <a:p>
             <a:pPr algn="ctr"/>
-          </a:p>
-        </p:txBody>
-      </p:sp>
-      <p:sp>
-        <p:nvSpPr>
-          <p:cNvPr id="10" name="TextBox 9"/>
-          <p:cNvSpPr txBox="1"/>
-          <p:nvPr/>
-        </p:nvSpPr>
-        <p:spPr>
-          <a:xfrm>
-            <a:off x="6446520" y="1417320"/>
-            <a:ext cx="5029200" cy="365760"/>
-          </a:xfrm>
-          <a:prstGeom prst="rect">
-            <a:avLst/>
-          </a:prstGeom>
-          <a:noFill/>
-        </p:spPr>
-        <p:txBody>
-          <a:bodyPr wrap="square" lIns="0" rIns="0" tIns="0" bIns="0">
-            <a:spAutoFit/>
-          </a:bodyPr>
-          <a:lstStyle/>
-          <a:p>
-            <a:pPr algn="l"/>
-            <a:r>
-              <a:rPr sz="1500" b="1">
-                <a:solidFill>
-                  <a:srgbClr val="36A2EB"/>
-                </a:solidFill>
-                <a:latin typeface="Calibri"/>
-              </a:rPr>
-              <a:t>Об'єкт дослідження</a:t>
-            </a:r>
-          </a:p>
-        </p:txBody>
-      </p:sp>
-      <p:sp>
-        <p:nvSpPr>
-          <p:cNvPr id="11" name="TextBox 10"/>
-          <p:cNvSpPr txBox="1"/>
-          <p:nvPr/>
-        </p:nvSpPr>
-        <p:spPr>
-          <a:xfrm>
-            <a:off x="6446520" y="1828800"/>
-            <a:ext cx="5029200" cy="1828800"/>
-          </a:xfrm>
-          <a:prstGeom prst="rect">
-            <a:avLst/>
-          </a:prstGeom>
-          <a:noFill/>
-        </p:spPr>
-        <p:txBody>
-          <a:bodyPr wrap="square" lIns="0" rIns="0" tIns="0" bIns="0">
-            <a:spAutoFit/>
-          </a:bodyPr>
-          <a:lstStyle/>
-          <a:p>
-            <a:pPr algn="l"/>
-            <a:r>
-              <a:rPr sz="1300" b="0">
-                <a:solidFill>
-                  <a:srgbClr val="212529"/>
-                </a:solidFill>
-                <a:latin typeface="Calibri"/>
-              </a:rPr>
-              <a:t>Локальна комп'ютерна мережа гуртожитків КНУ та мережеве обладнання, що забезпечує доступ користувачів до мережі Інтернет.</a:t>
-            </a:r>
-          </a:p>
-        </p:txBody>
-      </p:sp>
-      <p:sp>
-        <p:nvSpPr>
-          <p:cNvPr id="12" name="Rounded Rectangle 11"/>
-          <p:cNvSpPr/>
-          <p:nvPr/>
-        </p:nvSpPr>
-        <p:spPr>
-          <a:xfrm>
-            <a:off x="457200" y="3931920"/>
-            <a:ext cx="5486400" cy="2651760"/>
-          </a:xfrm>
-          <a:prstGeom prst="roundRect">
-            <a:avLst/>
-          </a:prstGeom>
-          <a:solidFill>
-            <a:srgbClr val="EBF2FA"/>
-          </a:solidFill>
-          <a:ln w="19050">
-            <a:solidFill>
-              <a:srgbClr val="F39C12"/>
-            </a:solidFill>
-          </a:ln>
-        </p:spPr>
-        <p:style>
-          <a:lnRef idx="1">
-            <a:schemeClr val="accent1"/>
-          </a:lnRef>
-          <a:fillRef idx="3">
-            <a:schemeClr val="accent1"/>
-          </a:fillRef>
-          <a:effectRef idx="2">
-            <a:schemeClr val="accent1"/>
-          </a:effectRef>
-          <a:fontRef idx="minor">
-            <a:schemeClr val="lt1"/>
-          </a:fontRef>
-        </p:style>
-        <p:txBody>
-          <a:bodyPr rtlCol="0" anchor="ctr"/>
-          <a:lstStyle/>
-          <a:p>
-            <a:pPr algn="ctr"/>
-          </a:p>
-        </p:txBody>
-      </p:sp>
-      <p:sp>
-        <p:nvSpPr>
-          <p:cNvPr id="13" name="TextBox 12"/>
-          <p:cNvSpPr txBox="1"/>
-          <p:nvPr/>
-        </p:nvSpPr>
-        <p:spPr>
-          <a:xfrm>
-            <a:off x="685800" y="4069080"/>
-            <a:ext cx="5029200" cy="365760"/>
-          </a:xfrm>
-          <a:prstGeom prst="rect">
-            <a:avLst/>
-          </a:prstGeom>
-          <a:noFill/>
-        </p:spPr>
-        <p:txBody>
-          <a:bodyPr wrap="square" lIns="0" rIns="0" tIns="0" bIns="0">
-            <a:spAutoFit/>
-          </a:bodyPr>
-          <a:lstStyle/>
-          <a:p>
-            <a:pPr algn="l"/>
-            <a:r>
-              <a:rPr sz="1500" b="1">
-                <a:solidFill>
-                  <a:srgbClr val="F39C12"/>
-                </a:solidFill>
-                <a:latin typeface="Calibri"/>
-              </a:rPr>
-              <a:t>Предмет дослідження</a:t>
-            </a:r>
-          </a:p>
-        </p:txBody>
-      </p:sp>
-      <p:sp>
-        <p:nvSpPr>
-          <p:cNvPr id="14" name="TextBox 13"/>
-          <p:cNvSpPr txBox="1"/>
-          <p:nvPr/>
-        </p:nvSpPr>
-        <p:spPr>
-          <a:xfrm>
-            <a:off x="685800" y="4480560"/>
-            <a:ext cx="5029200" cy="2011680"/>
-          </a:xfrm>
-          <a:prstGeom prst="rect">
-            <a:avLst/>
-          </a:prstGeom>
-          <a:noFill/>
-        </p:spPr>
-        <p:txBody>
-          <a:bodyPr wrap="square" lIns="0" rIns="0" tIns="0" bIns="0">
-            <a:spAutoFit/>
-          </a:bodyPr>
-          <a:lstStyle/>
-          <a:p>
-            <a:pPr algn="l"/>
-            <a:r>
-              <a:rPr sz="1300" b="0">
-                <a:solidFill>
-                  <a:srgbClr val="212529"/>
-                </a:solidFill>
-                <a:latin typeface="Calibri"/>
-              </a:rPr>
-              <a:t>Процеси конфігурації та адміністрування мережевого обладнання, технології VLAN, AAA та TACACS+, методи моніторингу і виявлення конфліктів IP-адрес.</a:t>
-            </a:r>
-          </a:p>
-        </p:txBody>
-      </p:sp>
-      <p:sp>
-        <p:nvSpPr>
-          <p:cNvPr id="15" name="Rounded Rectangle 14"/>
-          <p:cNvSpPr/>
-          <p:nvPr/>
-        </p:nvSpPr>
-        <p:spPr>
-          <a:xfrm>
-            <a:off x="6217920" y="3931920"/>
-            <a:ext cx="5486400" cy="2651760"/>
-          </a:xfrm>
-          <a:prstGeom prst="roundRect">
-            <a:avLst/>
-          </a:prstGeom>
-          <a:solidFill>
-            <a:srgbClr val="EBF2FA"/>
-          </a:solidFill>
-          <a:ln w="19050">
-            <a:solidFill>
-              <a:srgbClr val="27AE60"/>
-            </a:solidFill>
-          </a:ln>
-        </p:spPr>
-        <p:style>
-          <a:lnRef idx="1">
-            <a:schemeClr val="accent1"/>
-          </a:lnRef>
-          <a:fillRef idx="3">
-            <a:schemeClr val="accent1"/>
-          </a:fillRef>
-          <a:effectRef idx="2">
-            <a:schemeClr val="accent1"/>
-          </a:effectRef>
-          <a:fontRef idx="minor">
-            <a:schemeClr val="lt1"/>
-          </a:fontRef>
-        </p:style>
-        <p:txBody>
-          <a:bodyPr rtlCol="0" anchor="ctr"/>
-          <a:lstStyle/>
-          <a:p>
-            <a:pPr algn="ctr"/>
-          </a:p>
-        </p:txBody>
-      </p:sp>
-      <p:sp>
-        <p:nvSpPr>
-          <p:cNvPr id="16" name="TextBox 15"/>
-          <p:cNvSpPr txBox="1"/>
-          <p:nvPr/>
-        </p:nvSpPr>
-        <p:spPr>
-          <a:xfrm>
-            <a:off x="6446520" y="4069080"/>
-            <a:ext cx="5029200" cy="365760"/>
-          </a:xfrm>
-          <a:prstGeom prst="rect">
-            <a:avLst/>
-          </a:prstGeom>
-          <a:noFill/>
-        </p:spPr>
-        <p:txBody>
-          <a:bodyPr wrap="square" lIns="0" rIns="0" tIns="0" bIns="0">
-            <a:spAutoFit/>
-          </a:bodyPr>
-          <a:lstStyle/>
-          <a:p>
-            <a:pPr algn="l"/>
-            <a:r>
-              <a:rPr sz="1500" b="1">
-                <a:solidFill>
-                  <a:srgbClr val="27AE60"/>
-                </a:solidFill>
-                <a:latin typeface="Calibri"/>
-              </a:rPr>
-              <a:t>Практичне значення</a:t>
-            </a:r>
-          </a:p>
-        </p:txBody>
-      </p:sp>
-      <p:sp>
-        <p:nvSpPr>
-          <p:cNvPr id="17" name="TextBox 16"/>
-          <p:cNvSpPr txBox="1"/>
-          <p:nvPr/>
-        </p:nvSpPr>
-        <p:spPr>
-          <a:xfrm>
-            <a:off x="6446520" y="4480560"/>
-            <a:ext cx="5029200" cy="2011680"/>
-          </a:xfrm>
-          <a:prstGeom prst="rect">
-            <a:avLst/>
-          </a:prstGeom>
-          <a:noFill/>
-        </p:spPr>
-        <p:txBody>
-          <a:bodyPr wrap="square" lIns="0" rIns="0" tIns="0" bIns="0">
-            <a:spAutoFit/>
-          </a:bodyPr>
-          <a:lstStyle/>
-          <a:p>
-            <a:pPr algn="l"/>
-            <a:r>
-              <a:rPr sz="1300" b="0">
-                <a:solidFill>
-                  <a:srgbClr val="212529"/>
-                </a:solidFill>
-                <a:latin typeface="Calibri"/>
-              </a:rPr>
-              <a:t>Закріплення теоретичних знань і отримання практичних навичок роботи з комутаторами та маршрутизаторами в умовах реальної експлуатації.</a:t>
+            <a:r>
+              <a:rPr sz="1400" i="1">
+                <a:solidFill>
+                  <a:srgbClr val="6C757D"/>
+                </a:solidFill>
+                <a:latin typeface="Calibri"/>
+              </a:rPr>
+              <a:t>Фото центру / робочого місця</a:t>
             </a:r>
           </a:p>
         </p:txBody>
@@ -4632,7 +4765,7 @@
         </p:nvSpPr>
         <p:spPr>
           <a:xfrm>
-            <a:off x="457200" y="228600"/>
+            <a:off x="457200" y="201168"/>
             <a:ext cx="11247120" cy="640080"/>
           </a:xfrm>
           <a:prstGeom prst="rect">
@@ -4648,27 +4781,72 @@
           <a:p>
             <a:pPr algn="l"/>
             <a:r>
-              <a:rPr sz="2800" b="1">
+              <a:rPr sz="2800" b="1" i="0">
                 <a:solidFill>
                   <a:srgbClr val="FFFFFF"/>
                 </a:solidFill>
                 <a:latin typeface="Calibri"/>
               </a:rPr>
-              <a:t>Завдання та методи дослідження</a:t>
-            </a:r>
-          </a:p>
-        </p:txBody>
-      </p:sp>
-      <p:sp>
-        <p:nvSpPr>
-          <p:cNvPr id="5" name="TextBox 4"/>
+              <a:t>Мета, об'єкт і предмет дослідження</a:t>
+            </a:r>
+          </a:p>
+        </p:txBody>
+      </p:sp>
+      <p:sp>
+        <p:nvSpPr>
+          <p:cNvPr id="5" name="Rounded Rectangle 4"/>
+          <p:cNvSpPr/>
+          <p:nvPr/>
+        </p:nvSpPr>
+        <p:spPr>
+          <a:xfrm>
+            <a:off x="457200" y="1234440"/>
+            <a:ext cx="5669280" cy="2651760"/>
+          </a:xfrm>
+          <a:prstGeom prst="roundRect">
+            <a:avLst/>
+          </a:prstGeom>
+          <a:solidFill>
+            <a:srgbClr val="EBF2FA"/>
+          </a:solidFill>
+          <a:ln w="19050">
+            <a:solidFill>
+              <a:srgbClr val="204982"/>
+            </a:solidFill>
+          </a:ln>
+        </p:spPr>
+        <p:style>
+          <a:lnRef idx="1">
+            <a:schemeClr val="accent1"/>
+          </a:lnRef>
+          <a:fillRef idx="3">
+            <a:schemeClr val="accent1"/>
+          </a:fillRef>
+          <a:effectRef idx="2">
+            <a:schemeClr val="accent1"/>
+          </a:effectRef>
+          <a:fontRef idx="minor">
+            <a:schemeClr val="lt1"/>
+          </a:fontRef>
+        </p:style>
+        <p:txBody>
+          <a:bodyPr rtlCol="0" anchor="ctr"/>
+          <a:lstStyle/>
+          <a:p>
+            <a:pPr algn="ctr"/>
+          </a:p>
+        </p:txBody>
+      </p:sp>
+      <p:sp>
+        <p:nvSpPr>
+          <p:cNvPr id="6" name="TextBox 5"/>
           <p:cNvSpPr txBox="1"/>
           <p:nvPr/>
         </p:nvSpPr>
         <p:spPr>
           <a:xfrm>
-            <a:off x="548640" y="1280160"/>
-            <a:ext cx="5486400" cy="457200"/>
+            <a:off x="685800" y="1371600"/>
+            <a:ext cx="5212080" cy="365760"/>
           </a:xfrm>
           <a:prstGeom prst="rect">
             <a:avLst/>
@@ -4683,116 +4861,13 @@
           <a:p>
             <a:pPr algn="l"/>
             <a:r>
-              <a:rPr sz="2000" b="1">
+              <a:rPr sz="1500" b="1" i="0">
                 <a:solidFill>
                   <a:srgbClr val="204982"/>
                 </a:solidFill>
                 <a:latin typeface="Calibri"/>
               </a:rPr>
-              <a:t>Основні завдання</a:t>
-            </a:r>
-          </a:p>
-        </p:txBody>
-      </p:sp>
-      <p:sp>
-        <p:nvSpPr>
-          <p:cNvPr id="6" name="TextBox 5"/>
-          <p:cNvSpPr txBox="1"/>
-          <p:nvPr/>
-        </p:nvSpPr>
-        <p:spPr>
-          <a:xfrm>
-            <a:off x="548640" y="1783080"/>
-            <a:ext cx="5486400" cy="4572000"/>
-          </a:xfrm>
-          <a:prstGeom prst="rect">
-            <a:avLst/>
-          </a:prstGeom>
-          <a:noFill/>
-        </p:spPr>
-        <p:txBody>
-          <a:bodyPr wrap="square">
-            <a:spAutoFit/>
-          </a:bodyPr>
-          <a:lstStyle/>
-          <a:p>
-            <a:pPr algn="l">
-              <a:spcAft>
-                <a:spcPts val="600"/>
-              </a:spcAft>
-            </a:pPr>
-            <a:r>
-              <a:rPr sz="1500">
-                <a:solidFill>
-                  <a:srgbClr val="212529"/>
-                </a:solidFill>
-                <a:latin typeface="Calibri"/>
-              </a:rPr>
-              <a:t>•  Ознайомлення зі структурою та принципами роботи мережі</a:t>
-            </a:r>
-          </a:p>
-          <a:p>
-            <a:pPr algn="l">
-              <a:spcAft>
-                <a:spcPts val="600"/>
-              </a:spcAft>
-            </a:pPr>
-            <a:r>
-              <a:rPr sz="1500">
-                <a:solidFill>
-                  <a:srgbClr val="212529"/>
-                </a:solidFill>
-                <a:latin typeface="Calibri"/>
-              </a:rPr>
-              <a:t>•  Аналіз роботи маршрутизаторів і комутаторів</a:t>
-            </a:r>
-          </a:p>
-          <a:p>
-            <a:pPr algn="l">
-              <a:spcAft>
-                <a:spcPts val="600"/>
-              </a:spcAft>
-            </a:pPr>
-            <a:r>
-              <a:rPr sz="1500">
-                <a:solidFill>
-                  <a:srgbClr val="212529"/>
-                </a:solidFill>
-                <a:latin typeface="Calibri"/>
-              </a:rPr>
-              <a:t>•  Налаштування VLAN та параметрів доступу</a:t>
-            </a:r>
-          </a:p>
-          <a:p>
-            <a:pPr algn="l">
-              <a:spcAft>
-                <a:spcPts val="600"/>
-              </a:spcAft>
-            </a:pPr>
-            <a:r>
-              <a:rPr sz="1500">
-                <a:solidFill>
-                  <a:srgbClr val="212529"/>
-                </a:solidFill>
-                <a:latin typeface="Calibri"/>
-              </a:rPr>
-              <a:t>•  Тестування нових конфігурацій</a:t>
-            </a:r>
-          </a:p>
-          <a:p>
-            <a:pPr algn="l">
-              <a:spcAft>
-                <a:spcPts val="600"/>
-              </a:spcAft>
-            </a:pPr>
-            <a:r>
-              <a:rPr sz="1500">
-                <a:solidFill>
-                  <a:srgbClr val="212529"/>
-                </a:solidFill>
-                <a:latin typeface="Calibri"/>
-              </a:rPr>
-              <a:t>•  Аналіз документації та формування таблиць сумісності</a:t>
+              <a:t>Мета дослідження</a:t>
             </a:r>
           </a:p>
         </p:txBody>
@@ -4805,8 +4880,8 @@
         </p:nvSpPr>
         <p:spPr>
           <a:xfrm>
-            <a:off x="6400800" y="1280160"/>
-            <a:ext cx="5486400" cy="457200"/>
+            <a:off x="685800" y="1783080"/>
+            <a:ext cx="5212080" cy="2011680"/>
           </a:xfrm>
           <a:prstGeom prst="rect">
             <a:avLst/>
@@ -4821,27 +4896,72 @@
           <a:p>
             <a:pPr algn="l"/>
             <a:r>
-              <a:rPr sz="2000" b="1">
-                <a:solidFill>
-                  <a:srgbClr val="204982"/>
-                </a:solidFill>
-                <a:latin typeface="Calibri"/>
-              </a:rPr>
-              <a:t>Методи дослідження</a:t>
-            </a:r>
-          </a:p>
-        </p:txBody>
-      </p:sp>
-      <p:sp>
-        <p:nvSpPr>
-          <p:cNvPr id="8" name="TextBox 7"/>
+              <a:rPr sz="1200" b="0" i="0">
+                <a:solidFill>
+                  <a:srgbClr val="212529"/>
+                </a:solidFill>
+                <a:latin typeface="Calibri"/>
+              </a:rPr>
+              <a:t>Аналіз роботи локальної телекомунікаційної мережі, дослідження принципів конфігурації мережевого обладнання та забезпечення стабільної і безпечної роботи мережевої інфраструктури. Практика спрямована на закріплення теоретичних знань та отримання практичних навичок роботи з комутаторами та маршрутизаторами.</a:t>
+            </a:r>
+          </a:p>
+        </p:txBody>
+      </p:sp>
+      <p:sp>
+        <p:nvSpPr>
+          <p:cNvPr id="8" name="Rounded Rectangle 7"/>
+          <p:cNvSpPr/>
+          <p:nvPr/>
+        </p:nvSpPr>
+        <p:spPr>
+          <a:xfrm>
+            <a:off x="6309360" y="1234440"/>
+            <a:ext cx="5486400" cy="2651760"/>
+          </a:xfrm>
+          <a:prstGeom prst="roundRect">
+            <a:avLst/>
+          </a:prstGeom>
+          <a:solidFill>
+            <a:srgbClr val="EBF2FA"/>
+          </a:solidFill>
+          <a:ln w="19050">
+            <a:solidFill>
+              <a:srgbClr val="36A2EB"/>
+            </a:solidFill>
+          </a:ln>
+        </p:spPr>
+        <p:style>
+          <a:lnRef idx="1">
+            <a:schemeClr val="accent1"/>
+          </a:lnRef>
+          <a:fillRef idx="3">
+            <a:schemeClr val="accent1"/>
+          </a:fillRef>
+          <a:effectRef idx="2">
+            <a:schemeClr val="accent1"/>
+          </a:effectRef>
+          <a:fontRef idx="minor">
+            <a:schemeClr val="lt1"/>
+          </a:fontRef>
+        </p:style>
+        <p:txBody>
+          <a:bodyPr rtlCol="0" anchor="ctr"/>
+          <a:lstStyle/>
+          <a:p>
+            <a:pPr algn="ctr"/>
+          </a:p>
+        </p:txBody>
+      </p:sp>
+      <p:sp>
+        <p:nvSpPr>
+          <p:cNvPr id="9" name="TextBox 8"/>
           <p:cNvSpPr txBox="1"/>
           <p:nvPr/>
         </p:nvSpPr>
         <p:spPr>
           <a:xfrm>
-            <a:off x="6400800" y="1783080"/>
-            <a:ext cx="5486400" cy="4572000"/>
+            <a:off x="6537960" y="1371600"/>
+            <a:ext cx="5029200" cy="365760"/>
           </a:xfrm>
           <a:prstGeom prst="rect">
             <a:avLst/>
@@ -4849,100 +4969,174 @@
           <a:noFill/>
         </p:spPr>
         <p:txBody>
-          <a:bodyPr wrap="square">
+          <a:bodyPr wrap="square" lIns="0" rIns="0" tIns="0" bIns="0">
             <a:spAutoFit/>
           </a:bodyPr>
           <a:lstStyle/>
           <a:p>
-            <a:pPr algn="l">
-              <a:spcAft>
-                <a:spcPts val="600"/>
-              </a:spcAft>
-            </a:pPr>
-            <a:r>
-              <a:rPr sz="1500">
+            <a:pPr algn="l"/>
+            <a:r>
+              <a:rPr sz="1500" b="1" i="0">
+                <a:solidFill>
+                  <a:srgbClr val="36A2EB"/>
+                </a:solidFill>
+                <a:latin typeface="Calibri"/>
+              </a:rPr>
+              <a:t>Об'єкт дослідження</a:t>
+            </a:r>
+          </a:p>
+        </p:txBody>
+      </p:sp>
+      <p:sp>
+        <p:nvSpPr>
+          <p:cNvPr id="10" name="TextBox 9"/>
+          <p:cNvSpPr txBox="1"/>
+          <p:nvPr/>
+        </p:nvSpPr>
+        <p:spPr>
+          <a:xfrm>
+            <a:off x="6537960" y="1783080"/>
+            <a:ext cx="5029200" cy="2011680"/>
+          </a:xfrm>
+          <a:prstGeom prst="rect">
+            <a:avLst/>
+          </a:prstGeom>
+          <a:noFill/>
+        </p:spPr>
+        <p:txBody>
+          <a:bodyPr wrap="square" lIns="0" rIns="0" tIns="0" bIns="0">
+            <a:spAutoFit/>
+          </a:bodyPr>
+          <a:lstStyle/>
+          <a:p>
+            <a:pPr algn="l"/>
+            <a:r>
+              <a:rPr sz="1200" b="0" i="0">
                 <a:solidFill>
                   <a:srgbClr val="212529"/>
                 </a:solidFill>
                 <a:latin typeface="Calibri"/>
               </a:rPr>
-              <a:t>•  Технічний аналіз обладнання та характеристик</a:t>
-            </a:r>
-          </a:p>
-          <a:p>
-            <a:pPr algn="l">
-              <a:spcAft>
-                <a:spcPts val="600"/>
-              </a:spcAft>
-            </a:pPr>
-            <a:r>
-              <a:rPr sz="1500">
+              <a:t>Локальна комп'ютерна мережа гуртожитків КНУ та мережеве обладнання, що використовується для забезпечення доступу користувачів до мережі Інтернет: маршрутизатори MikroTik, керовані та некеровані комутатори D-Link, кабельна інфраструктура, точки доступу Wi-Fi.</a:t>
+            </a:r>
+          </a:p>
+        </p:txBody>
+      </p:sp>
+      <p:sp>
+        <p:nvSpPr>
+          <p:cNvPr id="11" name="Rounded Rectangle 10"/>
+          <p:cNvSpPr/>
+          <p:nvPr/>
+        </p:nvSpPr>
+        <p:spPr>
+          <a:xfrm>
+            <a:off x="457200" y="4023360"/>
+            <a:ext cx="11338560" cy="2606040"/>
+          </a:xfrm>
+          <a:prstGeom prst="roundRect">
+            <a:avLst/>
+          </a:prstGeom>
+          <a:solidFill>
+            <a:srgbClr val="EBF2FA"/>
+          </a:solidFill>
+          <a:ln w="19050">
+            <a:solidFill>
+              <a:srgbClr val="F39C12"/>
+            </a:solidFill>
+          </a:ln>
+        </p:spPr>
+        <p:style>
+          <a:lnRef idx="1">
+            <a:schemeClr val="accent1"/>
+          </a:lnRef>
+          <a:fillRef idx="3">
+            <a:schemeClr val="accent1"/>
+          </a:fillRef>
+          <a:effectRef idx="2">
+            <a:schemeClr val="accent1"/>
+          </a:effectRef>
+          <a:fontRef idx="minor">
+            <a:schemeClr val="lt1"/>
+          </a:fontRef>
+        </p:style>
+        <p:txBody>
+          <a:bodyPr rtlCol="0" anchor="ctr"/>
+          <a:lstStyle/>
+          <a:p>
+            <a:pPr algn="ctr"/>
+          </a:p>
+        </p:txBody>
+      </p:sp>
+      <p:sp>
+        <p:nvSpPr>
+          <p:cNvPr id="12" name="TextBox 11"/>
+          <p:cNvSpPr txBox="1"/>
+          <p:nvPr/>
+        </p:nvSpPr>
+        <p:spPr>
+          <a:xfrm>
+            <a:off x="685800" y="4160520"/>
+            <a:ext cx="10881360" cy="365760"/>
+          </a:xfrm>
+          <a:prstGeom prst="rect">
+            <a:avLst/>
+          </a:prstGeom>
+          <a:noFill/>
+        </p:spPr>
+        <p:txBody>
+          <a:bodyPr wrap="square" lIns="0" rIns="0" tIns="0" bIns="0">
+            <a:spAutoFit/>
+          </a:bodyPr>
+          <a:lstStyle/>
+          <a:p>
+            <a:pPr algn="l"/>
+            <a:r>
+              <a:rPr sz="1500" b="1" i="0">
+                <a:solidFill>
+                  <a:srgbClr val="F39C12"/>
+                </a:solidFill>
+                <a:latin typeface="Calibri"/>
+              </a:rPr>
+              <a:t>Предмет дослідження</a:t>
+            </a:r>
+          </a:p>
+        </p:txBody>
+      </p:sp>
+      <p:sp>
+        <p:nvSpPr>
+          <p:cNvPr id="13" name="TextBox 12"/>
+          <p:cNvSpPr txBox="1"/>
+          <p:nvPr/>
+        </p:nvSpPr>
+        <p:spPr>
+          <a:xfrm>
+            <a:off x="685800" y="4572000"/>
+            <a:ext cx="10881360" cy="1965960"/>
+          </a:xfrm>
+          <a:prstGeom prst="rect">
+            <a:avLst/>
+          </a:prstGeom>
+          <a:noFill/>
+        </p:spPr>
+        <p:txBody>
+          <a:bodyPr wrap="square" lIns="0" rIns="0" tIns="0" bIns="0">
+            <a:spAutoFit/>
+          </a:bodyPr>
+          <a:lstStyle/>
+          <a:p>
+            <a:pPr algn="l"/>
+            <a:r>
+              <a:rPr sz="1300" b="0" i="0">
                 <a:solidFill>
                   <a:srgbClr val="212529"/>
                 </a:solidFill>
                 <a:latin typeface="Calibri"/>
               </a:rPr>
-              <a:t>•  Діагностика несправностей мережевими утилітами</a:t>
-            </a:r>
-          </a:p>
-          <a:p>
-            <a:pPr algn="l">
-              <a:spcAft>
-                <a:spcPts val="600"/>
-              </a:spcAft>
-            </a:pPr>
-            <a:r>
-              <a:rPr sz="1500">
-                <a:solidFill>
-                  <a:srgbClr val="212529"/>
-                </a:solidFill>
-                <a:latin typeface="Calibri"/>
-              </a:rPr>
-              <a:t>•  Порівняння конфігурацій і перевірка сумісності</a:t>
-            </a:r>
-          </a:p>
-          <a:p>
-            <a:pPr algn="l">
-              <a:spcAft>
-                <a:spcPts val="600"/>
-              </a:spcAft>
-            </a:pPr>
-            <a:r>
-              <a:rPr sz="1500">
-                <a:solidFill>
-                  <a:srgbClr val="212529"/>
-                </a:solidFill>
-                <a:latin typeface="Calibri"/>
-              </a:rPr>
-              <a:t>•  Спостереження за роботою мережі в реальних умовах</a:t>
-            </a:r>
-          </a:p>
-        </p:txBody>
-      </p:sp>
-      <p:pic>
-        <p:nvPicPr>
-          <p:cNvPr id="9" name="Picture 8" descr="goals.png"/>
-          <p:cNvPicPr>
-            <a:picLocks noChangeAspect="1"/>
-          </p:cNvPicPr>
-          <p:nvPr/>
-        </p:nvPicPr>
-        <p:blipFill>
-          <a:blip r:embed="rId2"/>
-          <a:stretch>
-            <a:fillRect/>
-          </a:stretch>
-        </p:blipFill>
-        <p:spPr>
-          <a:xfrm>
-            <a:off x="9601200" y="4206240"/>
-            <a:ext cx="3169920" cy="2377440"/>
-          </a:xfrm>
-          <a:prstGeom prst="rect">
-            <a:avLst/>
-          </a:prstGeom>
-        </p:spPr>
-      </p:pic>
+              <a:t>Процеси конфігурації та адміністрування мережевого обладнання, технології VLAN, AAA та TACACS+, методи моніторингу мережі, виявлення конфліктів IP-адрес та способи забезпечення стабільної роботи телекомунікаційної інфраструктури. Особлива увага приділяється безпеці доступу адміністраторів і централізованому управлінню обладнанням.</a:t>
+            </a:r>
+          </a:p>
+        </p:txBody>
+      </p:sp>
     </p:spTree>
   </p:cSld>
   <p:clrMapOvr>
@@ -5055,7 +5249,7 @@
         </p:nvSpPr>
         <p:spPr>
           <a:xfrm>
-            <a:off x="457200" y="228600"/>
+            <a:off x="457200" y="201168"/>
             <a:ext cx="11247120" cy="640080"/>
           </a:xfrm>
           <a:prstGeom prst="rect">
@@ -5071,51 +5265,27 @@
           <a:p>
             <a:pPr algn="l"/>
             <a:r>
-              <a:rPr sz="2800" b="1">
+              <a:rPr sz="2800" b="1" i="0">
                 <a:solidFill>
                   <a:srgbClr val="FFFFFF"/>
                 </a:solidFill>
                 <a:latin typeface="Calibri"/>
               </a:rPr>
-              <a:t>Розділ 1. Структура локальної мережі гуртожитків</a:t>
-            </a:r>
-          </a:p>
-        </p:txBody>
-      </p:sp>
-      <p:pic>
-        <p:nvPicPr>
-          <p:cNvPr id="5" name="Picture 4" descr="topology.png"/>
-          <p:cNvPicPr>
-            <a:picLocks noChangeAspect="1"/>
-          </p:cNvPicPr>
-          <p:nvPr/>
-        </p:nvPicPr>
-        <p:blipFill>
-          <a:blip r:embed="rId2"/>
-          <a:stretch>
-            <a:fillRect/>
-          </a:stretch>
-        </p:blipFill>
-        <p:spPr>
-          <a:xfrm>
-            <a:off x="365760" y="1280160"/>
-            <a:ext cx="6309360" cy="4206240"/>
-          </a:xfrm>
-          <a:prstGeom prst="rect">
-            <a:avLst/>
-          </a:prstGeom>
-        </p:spPr>
-      </p:pic>
-      <p:sp>
-        <p:nvSpPr>
-          <p:cNvPr id="6" name="TextBox 5"/>
+              <a:t>Завдання та методи дослідження</a:t>
+            </a:r>
+          </a:p>
+        </p:txBody>
+      </p:sp>
+      <p:sp>
+        <p:nvSpPr>
+          <p:cNvPr id="5" name="TextBox 4"/>
           <p:cNvSpPr txBox="1"/>
           <p:nvPr/>
         </p:nvSpPr>
         <p:spPr>
           <a:xfrm>
-            <a:off x="7955279" y="1371600"/>
-            <a:ext cx="4023360" cy="457200"/>
+            <a:off x="457200" y="1234440"/>
+            <a:ext cx="5486400" cy="457200"/>
           </a:xfrm>
           <a:prstGeom prst="rect">
             <a:avLst/>
@@ -5130,27 +5300,27 @@
           <a:p>
             <a:pPr algn="l"/>
             <a:r>
-              <a:rPr sz="1800" b="1">
+              <a:rPr sz="2000" b="1" i="0">
                 <a:solidFill>
                   <a:srgbClr val="204982"/>
                 </a:solidFill>
                 <a:latin typeface="Calibri"/>
               </a:rPr>
-              <a:t>Архітектура мережі</a:t>
-            </a:r>
-          </a:p>
-        </p:txBody>
-      </p:sp>
-      <p:sp>
-        <p:nvSpPr>
-          <p:cNvPr id="7" name="TextBox 6"/>
+              <a:t>Основні завдання</a:t>
+            </a:r>
+          </a:p>
+        </p:txBody>
+      </p:sp>
+      <p:sp>
+        <p:nvSpPr>
+          <p:cNvPr id="6" name="TextBox 5"/>
           <p:cNvSpPr txBox="1"/>
           <p:nvPr/>
         </p:nvSpPr>
         <p:spPr>
           <a:xfrm>
-            <a:off x="7955279" y="1874519"/>
-            <a:ext cx="4023360" cy="4572000"/>
+            <a:off x="457200" y="1737360"/>
+            <a:ext cx="5669280" cy="4572000"/>
           </a:xfrm>
           <a:prstGeom prst="rect">
             <a:avLst/>
@@ -5165,97 +5335,402 @@
           <a:p>
             <a:pPr algn="l">
               <a:spcAft>
-                <a:spcPts val="600"/>
+                <a:spcPts val="800"/>
               </a:spcAft>
             </a:pPr>
             <a:r>
-              <a:rPr sz="1300">
+              <a:rPr sz="1400">
                 <a:solidFill>
                   <a:srgbClr val="212529"/>
                 </a:solidFill>
                 <a:latin typeface="Calibri"/>
               </a:rPr>
-              <a:t>•  Центральний маршрутизатор MikroTik RB5009</a:t>
+              <a:t>•  Ознайомлення зі структурою та принципами роботи локальної мережі гуртожитків</a:t>
             </a:r>
           </a:p>
           <a:p>
             <a:pPr algn="l">
               <a:spcAft>
-                <a:spcPts val="600"/>
+                <a:spcPts val="800"/>
               </a:spcAft>
             </a:pPr>
             <a:r>
-              <a:rPr sz="1300">
+              <a:rPr sz="1400">
                 <a:solidFill>
                   <a:srgbClr val="212529"/>
                 </a:solidFill>
                 <a:latin typeface="Calibri"/>
               </a:rPr>
-              <a:t>•  Керовані комутатори D-Link DGS-1210 (L2)</a:t>
+              <a:t>•  Аналіз роботи маршрутизаторів, комутаторів та допоміжного мережевого обладнання</a:t>
             </a:r>
           </a:p>
           <a:p>
             <a:pPr algn="l">
               <a:spcAft>
-                <a:spcPts val="600"/>
+                <a:spcPts val="800"/>
               </a:spcAft>
             </a:pPr>
             <a:r>
-              <a:rPr sz="1300">
+              <a:rPr sz="1400">
                 <a:solidFill>
                   <a:srgbClr val="212529"/>
                 </a:solidFill>
                 <a:latin typeface="Calibri"/>
               </a:rPr>
-              <a:t>•  Некеровані комутатори DES-1000 / 2000</a:t>
+              <a:t>•  Налаштування VLAN та параметрів доступу для різних груп користувачів</a:t>
             </a:r>
           </a:p>
           <a:p>
             <a:pPr algn="l">
               <a:spcAft>
-                <a:spcPts val="600"/>
+                <a:spcPts val="800"/>
               </a:spcAft>
             </a:pPr>
             <a:r>
-              <a:rPr sz="1300">
+              <a:rPr sz="1400">
                 <a:solidFill>
                   <a:srgbClr val="212529"/>
                 </a:solidFill>
                 <a:latin typeface="Calibri"/>
               </a:rPr>
-              <a:t>•  Магістральні trunk-канали</a:t>
+              <a:t>•  Тестування нових конфігурацій комутаторів у реальних умовах</a:t>
             </a:r>
           </a:p>
           <a:p>
             <a:pPr algn="l">
               <a:spcAft>
-                <a:spcPts val="600"/>
+                <a:spcPts val="800"/>
               </a:spcAft>
             </a:pPr>
             <a:r>
-              <a:rPr sz="1300">
+              <a:rPr sz="1400">
                 <a:solidFill>
                   <a:srgbClr val="212529"/>
                 </a:solidFill>
                 <a:latin typeface="Calibri"/>
               </a:rPr>
-              <a:t>•  Сегментація через VLAN</a:t>
+              <a:t>•  Аналіз технічної документації та формування таблиць сумісності обладнання</a:t>
             </a:r>
           </a:p>
           <a:p>
             <a:pPr algn="l">
               <a:spcAft>
-                <a:spcPts val="600"/>
+                <a:spcPts val="800"/>
               </a:spcAft>
             </a:pPr>
             <a:r>
-              <a:rPr sz="1300">
+              <a:rPr sz="1400">
                 <a:solidFill>
                   <a:srgbClr val="212529"/>
                 </a:solidFill>
                 <a:latin typeface="Calibri"/>
               </a:rPr>
-              <a:t>•  Підключення сотень користувачів гуртожитків</a:t>
+              <a:t>•  Участь у діагностиці та усуненні аварійних ситуацій у мережі</a:t>
+            </a:r>
+          </a:p>
+        </p:txBody>
+      </p:sp>
+      <p:sp>
+        <p:nvSpPr>
+          <p:cNvPr id="7" name="TextBox 6"/>
+          <p:cNvSpPr txBox="1"/>
+          <p:nvPr/>
+        </p:nvSpPr>
+        <p:spPr>
+          <a:xfrm>
+            <a:off x="6309360" y="1234440"/>
+            <a:ext cx="5486400" cy="457200"/>
+          </a:xfrm>
+          <a:prstGeom prst="rect">
+            <a:avLst/>
+          </a:prstGeom>
+          <a:noFill/>
+        </p:spPr>
+        <p:txBody>
+          <a:bodyPr wrap="square" lIns="0" rIns="0" tIns="0" bIns="0">
+            <a:spAutoFit/>
+          </a:bodyPr>
+          <a:lstStyle/>
+          <a:p>
+            <a:pPr algn="l"/>
+            <a:r>
+              <a:rPr sz="2000" b="1" i="0">
+                <a:solidFill>
+                  <a:srgbClr val="204982"/>
+                </a:solidFill>
+                <a:latin typeface="Calibri"/>
+              </a:rPr>
+              <a:t>Методи дослідження</a:t>
+            </a:r>
+          </a:p>
+        </p:txBody>
+      </p:sp>
+      <p:sp>
+        <p:nvSpPr>
+          <p:cNvPr id="8" name="TextBox 7"/>
+          <p:cNvSpPr txBox="1"/>
+          <p:nvPr/>
+        </p:nvSpPr>
+        <p:spPr>
+          <a:xfrm>
+            <a:off x="6309360" y="1737360"/>
+            <a:ext cx="5486400" cy="4572000"/>
+          </a:xfrm>
+          <a:prstGeom prst="rect">
+            <a:avLst/>
+          </a:prstGeom>
+          <a:noFill/>
+        </p:spPr>
+        <p:txBody>
+          <a:bodyPr wrap="square">
+            <a:spAutoFit/>
+          </a:bodyPr>
+          <a:lstStyle/>
+          <a:p>
+            <a:pPr algn="l">
+              <a:spcAft>
+                <a:spcPts val="800"/>
+              </a:spcAft>
+            </a:pPr>
+            <a:r>
+              <a:rPr sz="1400">
+                <a:solidFill>
+                  <a:srgbClr val="212529"/>
+                </a:solidFill>
+                <a:latin typeface="Calibri"/>
+              </a:rPr>
+              <a:t>•  Технічний аналіз мережевого обладнання та його характеристик</a:t>
+            </a:r>
+          </a:p>
+          <a:p>
+            <a:pPr algn="l">
+              <a:spcAft>
+                <a:spcPts val="800"/>
+              </a:spcAft>
+            </a:pPr>
+            <a:r>
+              <a:rPr sz="1400">
+                <a:solidFill>
+                  <a:srgbClr val="212529"/>
+                </a:solidFill>
+                <a:latin typeface="Calibri"/>
+              </a:rPr>
+              <a:t>•  Діагностика несправностей за допомогою мережевих утиліт (ping, traceroute, ARP)</a:t>
+            </a:r>
+          </a:p>
+          <a:p>
+            <a:pPr algn="l">
+              <a:spcAft>
+                <a:spcPts val="800"/>
+              </a:spcAft>
+            </a:pPr>
+            <a:r>
+              <a:rPr sz="1400">
+                <a:solidFill>
+                  <a:srgbClr val="212529"/>
+                </a:solidFill>
+                <a:latin typeface="Calibri"/>
+              </a:rPr>
+              <a:t>•  Порівняння конфігурацій та перевірка сумісності обладнання</a:t>
+            </a:r>
+          </a:p>
+          <a:p>
+            <a:pPr algn="l">
+              <a:spcAft>
+                <a:spcPts val="800"/>
+              </a:spcAft>
+            </a:pPr>
+            <a:r>
+              <a:rPr sz="1400">
+                <a:solidFill>
+                  <a:srgbClr val="212529"/>
+                </a:solidFill>
+                <a:latin typeface="Calibri"/>
+              </a:rPr>
+              <a:t>•  Спостереження за роботою інфраструктури в умовах реальної експлуатації</a:t>
+            </a:r>
+          </a:p>
+          <a:p>
+            <a:pPr algn="l">
+              <a:spcAft>
+                <a:spcPts val="800"/>
+              </a:spcAft>
+            </a:pPr>
+            <a:r>
+              <a:rPr sz="1400">
+                <a:solidFill>
+                  <a:srgbClr val="212529"/>
+                </a:solidFill>
+                <a:latin typeface="Calibri"/>
+              </a:rPr>
+              <a:t>•  Робота з веб-інтерфейсами адміністрування D-Link та RouterOS MikroTik</a:t>
+            </a:r>
+          </a:p>
+          <a:p>
+            <a:pPr algn="l">
+              <a:spcAft>
+                <a:spcPts val="800"/>
+              </a:spcAft>
+            </a:pPr>
+            <a:r>
+              <a:rPr sz="1400">
+                <a:solidFill>
+                  <a:srgbClr val="212529"/>
+                </a:solidFill>
+                <a:latin typeface="Calibri"/>
+              </a:rPr>
+              <a:t>•  Збір та систематизація даних щодо звернень користувачів</a:t>
+            </a:r>
+          </a:p>
+        </p:txBody>
+      </p:sp>
+      <p:sp>
+        <p:nvSpPr>
+          <p:cNvPr id="9" name="Rectangle 8"/>
+          <p:cNvSpPr/>
+          <p:nvPr/>
+        </p:nvSpPr>
+        <p:spPr>
+          <a:xfrm>
+            <a:off x="4572000" y="5120640"/>
+            <a:ext cx="3200400" cy="1463040"/>
+          </a:xfrm>
+          <a:prstGeom prst="rect">
+            <a:avLst/>
+          </a:prstGeom>
+          <a:solidFill>
+            <a:srgbClr val="F4F6F9"/>
+          </a:solidFill>
+          <a:ln w="19050">
+            <a:solidFill>
+              <a:srgbClr val="B0B8C4"/>
+            </a:solidFill>
+            <a:prstDash val="lgDash"/>
+          </a:ln>
+        </p:spPr>
+        <p:style>
+          <a:lnRef idx="1">
+            <a:schemeClr val="accent1"/>
+          </a:lnRef>
+          <a:fillRef idx="3">
+            <a:schemeClr val="accent1"/>
+          </a:fillRef>
+          <a:effectRef idx="2">
+            <a:schemeClr val="accent1"/>
+          </a:effectRef>
+          <a:fontRef idx="minor">
+            <a:schemeClr val="lt1"/>
+          </a:fontRef>
+        </p:style>
+        <p:txBody>
+          <a:bodyPr rtlCol="0" anchor="ctr"/>
+          <a:lstStyle/>
+          <a:p>
+            <a:pPr algn="ctr"/>
+          </a:p>
+        </p:txBody>
+      </p:sp>
+      <p:cxnSp>
+        <p:nvCxnSpPr>
+          <p:cNvPr id="10" name="Connector 9"/>
+          <p:cNvCxnSpPr/>
+          <p:nvPr/>
+        </p:nvCxnSpPr>
+        <p:spPr>
+          <a:xfrm>
+            <a:off x="4572000" y="5120640"/>
+            <a:ext cx="3200400" cy="1463040"/>
+          </a:xfrm>
+          <a:prstGeom prst="line">
+            <a:avLst/>
+          </a:prstGeom>
+          <a:ln w="9525">
+            <a:solidFill>
+              <a:srgbClr val="B0B8C4"/>
+            </a:solidFill>
+          </a:ln>
+        </p:spPr>
+        <p:style>
+          <a:lnRef idx="2">
+            <a:schemeClr val="accent1"/>
+          </a:lnRef>
+          <a:fillRef idx="0">
+            <a:schemeClr val="accent1"/>
+          </a:fillRef>
+          <a:effectRef idx="1">
+            <a:schemeClr val="accent1"/>
+          </a:effectRef>
+          <a:fontRef idx="minor">
+            <a:schemeClr val="tx1"/>
+          </a:fontRef>
+        </p:style>
+      </p:cxnSp>
+      <p:cxnSp>
+        <p:nvCxnSpPr>
+          <p:cNvPr id="11" name="Connector 10"/>
+          <p:cNvCxnSpPr/>
+          <p:nvPr/>
+        </p:nvCxnSpPr>
+        <p:spPr>
+          <a:xfrm flipH="1">
+            <a:off x="4572000" y="5120640"/>
+            <a:ext cx="3200400" cy="1463040"/>
+          </a:xfrm>
+          <a:prstGeom prst="line">
+            <a:avLst/>
+          </a:prstGeom>
+          <a:ln w="9525">
+            <a:solidFill>
+              <a:srgbClr val="B0B8C4"/>
+            </a:solidFill>
+          </a:ln>
+        </p:spPr>
+        <p:style>
+          <a:lnRef idx="2">
+            <a:schemeClr val="accent1"/>
+          </a:lnRef>
+          <a:fillRef idx="0">
+            <a:schemeClr val="accent1"/>
+          </a:fillRef>
+          <a:effectRef idx="1">
+            <a:schemeClr val="accent1"/>
+          </a:effectRef>
+          <a:fontRef idx="minor">
+            <a:schemeClr val="tx1"/>
+          </a:fontRef>
+        </p:style>
+      </p:cxnSp>
+      <p:sp>
+        <p:nvSpPr>
+          <p:cNvPr id="12" name="TextBox 11"/>
+          <p:cNvSpPr txBox="1"/>
+          <p:nvPr/>
+        </p:nvSpPr>
+        <p:spPr>
+          <a:xfrm>
+            <a:off x="4572000" y="5669280"/>
+            <a:ext cx="3200400" cy="365760"/>
+          </a:xfrm>
+          <a:prstGeom prst="rect">
+            <a:avLst/>
+          </a:prstGeom>
+          <a:noFill/>
+        </p:spPr>
+        <p:txBody>
+          <a:bodyPr wrap="square">
+            <a:spAutoFit/>
+          </a:bodyPr>
+          <a:lstStyle/>
+          <a:p>
+            <a:pPr algn="ctr"/>
+            <a:r>
+              <a:rPr sz="1400" i="1">
+                <a:solidFill>
+                  <a:srgbClr val="6C757D"/>
+                </a:solidFill>
+                <a:latin typeface="Calibri"/>
+              </a:rPr>
+              <a:t>Іконка / схема методології</a:t>
             </a:r>
           </a:p>
         </p:txBody>
@@ -5372,7 +5847,7 @@
         </p:nvSpPr>
         <p:spPr>
           <a:xfrm>
-            <a:off x="457200" y="228600"/>
+            <a:off x="457200" y="201168"/>
             <a:ext cx="11247120" cy="640080"/>
           </a:xfrm>
           <a:prstGeom prst="rect">
@@ -5388,51 +5863,178 @@
           <a:p>
             <a:pPr algn="l"/>
             <a:r>
-              <a:rPr sz="2800" b="1">
+              <a:rPr sz="2800" b="1" i="0">
                 <a:solidFill>
                   <a:srgbClr val="FFFFFF"/>
                 </a:solidFill>
                 <a:latin typeface="Calibri"/>
               </a:rPr>
-              <a:t>Мережеве обладнання — маршрутизатор і комутатори</a:t>
-            </a:r>
-          </a:p>
-        </p:txBody>
-      </p:sp>
-      <p:pic>
-        <p:nvPicPr>
-          <p:cNvPr id="5" name="Picture 4" descr="router.png"/>
-          <p:cNvPicPr>
-            <a:picLocks noChangeAspect="1"/>
-          </p:cNvPicPr>
-          <p:nvPr/>
-        </p:nvPicPr>
-        <p:blipFill>
-          <a:blip r:embed="rId2"/>
-          <a:stretch>
-            <a:fillRect/>
-          </a:stretch>
-        </p:blipFill>
-        <p:spPr>
-          <a:xfrm>
-            <a:off x="457200" y="1280160"/>
-            <a:ext cx="7315200" cy="4064000"/>
-          </a:xfrm>
-          <a:prstGeom prst="rect">
-            <a:avLst/>
-          </a:prstGeom>
-        </p:spPr>
-      </p:pic>
-      <p:sp>
-        <p:nvSpPr>
-          <p:cNvPr id="6" name="TextBox 5"/>
+              <a:t>Розділ 1. Структура локальної мережі гуртожитків</a:t>
+            </a:r>
+          </a:p>
+        </p:txBody>
+      </p:sp>
+      <p:sp>
+        <p:nvSpPr>
+          <p:cNvPr id="5" name="Rectangle 4"/>
+          <p:cNvSpPr/>
+          <p:nvPr/>
+        </p:nvSpPr>
+        <p:spPr>
+          <a:xfrm>
+            <a:off x="457200" y="1234440"/>
+            <a:ext cx="5486400" cy="5303520"/>
+          </a:xfrm>
+          <a:prstGeom prst="rect">
+            <a:avLst/>
+          </a:prstGeom>
+          <a:solidFill>
+            <a:srgbClr val="F4F6F9"/>
+          </a:solidFill>
+          <a:ln w="19050">
+            <a:solidFill>
+              <a:srgbClr val="B0B8C4"/>
+            </a:solidFill>
+            <a:prstDash val="lgDash"/>
+          </a:ln>
+        </p:spPr>
+        <p:style>
+          <a:lnRef idx="1">
+            <a:schemeClr val="accent1"/>
+          </a:lnRef>
+          <a:fillRef idx="3">
+            <a:schemeClr val="accent1"/>
+          </a:fillRef>
+          <a:effectRef idx="2">
+            <a:schemeClr val="accent1"/>
+          </a:effectRef>
+          <a:fontRef idx="minor">
+            <a:schemeClr val="lt1"/>
+          </a:fontRef>
+        </p:style>
+        <p:txBody>
+          <a:bodyPr rtlCol="0" anchor="ctr"/>
+          <a:lstStyle/>
+          <a:p>
+            <a:pPr algn="ctr"/>
+          </a:p>
+        </p:txBody>
+      </p:sp>
+      <p:cxnSp>
+        <p:nvCxnSpPr>
+          <p:cNvPr id="6" name="Connector 5"/>
+          <p:cNvCxnSpPr/>
+          <p:nvPr/>
+        </p:nvCxnSpPr>
+        <p:spPr>
+          <a:xfrm>
+            <a:off x="457200" y="1234440"/>
+            <a:ext cx="5486400" cy="5303520"/>
+          </a:xfrm>
+          <a:prstGeom prst="line">
+            <a:avLst/>
+          </a:prstGeom>
+          <a:ln w="9525">
+            <a:solidFill>
+              <a:srgbClr val="B0B8C4"/>
+            </a:solidFill>
+          </a:ln>
+        </p:spPr>
+        <p:style>
+          <a:lnRef idx="2">
+            <a:schemeClr val="accent1"/>
+          </a:lnRef>
+          <a:fillRef idx="0">
+            <a:schemeClr val="accent1"/>
+          </a:fillRef>
+          <a:effectRef idx="1">
+            <a:schemeClr val="accent1"/>
+          </a:effectRef>
+          <a:fontRef idx="minor">
+            <a:schemeClr val="tx1"/>
+          </a:fontRef>
+        </p:style>
+      </p:cxnSp>
+      <p:cxnSp>
+        <p:nvCxnSpPr>
+          <p:cNvPr id="7" name="Connector 6"/>
+          <p:cNvCxnSpPr/>
+          <p:nvPr/>
+        </p:nvCxnSpPr>
+        <p:spPr>
+          <a:xfrm flipH="1">
+            <a:off x="457200" y="1234440"/>
+            <a:ext cx="5486400" cy="5303520"/>
+          </a:xfrm>
+          <a:prstGeom prst="line">
+            <a:avLst/>
+          </a:prstGeom>
+          <a:ln w="9525">
+            <a:solidFill>
+              <a:srgbClr val="B0B8C4"/>
+            </a:solidFill>
+          </a:ln>
+        </p:spPr>
+        <p:style>
+          <a:lnRef idx="2">
+            <a:schemeClr val="accent1"/>
+          </a:lnRef>
+          <a:fillRef idx="0">
+            <a:schemeClr val="accent1"/>
+          </a:fillRef>
+          <a:effectRef idx="1">
+            <a:schemeClr val="accent1"/>
+          </a:effectRef>
+          <a:fontRef idx="minor">
+            <a:schemeClr val="tx1"/>
+          </a:fontRef>
+        </p:style>
+      </p:cxnSp>
+      <p:sp>
+        <p:nvSpPr>
+          <p:cNvPr id="8" name="TextBox 7"/>
           <p:cNvSpPr txBox="1"/>
           <p:nvPr/>
         </p:nvSpPr>
         <p:spPr>
           <a:xfrm>
-            <a:off x="8138160" y="1371600"/>
-            <a:ext cx="3840480" cy="457200"/>
+            <a:off x="457200" y="3703320"/>
+            <a:ext cx="5486400" cy="365760"/>
+          </a:xfrm>
+          <a:prstGeom prst="rect">
+            <a:avLst/>
+          </a:prstGeom>
+          <a:noFill/>
+        </p:spPr>
+        <p:txBody>
+          <a:bodyPr wrap="square">
+            <a:spAutoFit/>
+          </a:bodyPr>
+          <a:lstStyle/>
+          <a:p>
+            <a:pPr algn="ctr"/>
+            <a:r>
+              <a:rPr sz="1400" i="1">
+                <a:solidFill>
+                  <a:srgbClr val="6C757D"/>
+                </a:solidFill>
+                <a:latin typeface="Calibri"/>
+              </a:rPr>
+              <a:t>Схема топології локальної мережі</a:t>
+            </a:r>
+          </a:p>
+        </p:txBody>
+      </p:sp>
+      <p:sp>
+        <p:nvSpPr>
+          <p:cNvPr id="9" name="TextBox 8"/>
+          <p:cNvSpPr txBox="1"/>
+          <p:nvPr/>
+        </p:nvSpPr>
+        <p:spPr>
+          <a:xfrm>
+            <a:off x="6217920" y="1280160"/>
+            <a:ext cx="5669280" cy="457200"/>
           </a:xfrm>
           <a:prstGeom prst="rect">
             <a:avLst/>
@@ -5447,114 +6049,27 @@
           <a:p>
             <a:pPr algn="l"/>
             <a:r>
-              <a:rPr sz="1600" b="1">
+              <a:rPr sz="1800" b="1" i="0">
                 <a:solidFill>
                   <a:srgbClr val="204982"/>
                 </a:solidFill>
                 <a:latin typeface="Calibri"/>
               </a:rPr>
-              <a:t>MikroTik RB5009UG+S+IN</a:t>
-            </a:r>
-          </a:p>
-        </p:txBody>
-      </p:sp>
-      <p:sp>
-        <p:nvSpPr>
-          <p:cNvPr id="7" name="TextBox 6"/>
+              <a:t>Архітектура мережі</a:t>
+            </a:r>
+          </a:p>
+        </p:txBody>
+      </p:sp>
+      <p:sp>
+        <p:nvSpPr>
+          <p:cNvPr id="10" name="TextBox 9"/>
           <p:cNvSpPr txBox="1"/>
           <p:nvPr/>
         </p:nvSpPr>
         <p:spPr>
           <a:xfrm>
-            <a:off x="8138160" y="1828800"/>
-            <a:ext cx="3840480" cy="2286000"/>
-          </a:xfrm>
-          <a:prstGeom prst="rect">
-            <a:avLst/>
-          </a:prstGeom>
-          <a:noFill/>
-        </p:spPr>
-        <p:txBody>
-          <a:bodyPr wrap="square">
-            <a:spAutoFit/>
-          </a:bodyPr>
-          <a:lstStyle/>
-          <a:p>
-            <a:pPr algn="l">
-              <a:spcAft>
-                <a:spcPts val="600"/>
-              </a:spcAft>
-            </a:pPr>
-            <a:r>
-              <a:rPr sz="1200">
-                <a:solidFill>
-                  <a:srgbClr val="212529"/>
-                </a:solidFill>
-                <a:latin typeface="Calibri"/>
-              </a:rPr>
-              <a:t>•  4-ядерний CPU, велика RAM</a:t>
-            </a:r>
-          </a:p>
-          <a:p>
-            <a:pPr algn="l">
-              <a:spcAft>
-                <a:spcPts val="600"/>
-              </a:spcAft>
-            </a:pPr>
-            <a:r>
-              <a:rPr sz="1200">
-                <a:solidFill>
-                  <a:srgbClr val="212529"/>
-                </a:solidFill>
-                <a:latin typeface="Calibri"/>
-              </a:rPr>
-              <a:t>•  8× 1GbE + 1× 10G SFP+</a:t>
-            </a:r>
-          </a:p>
-          <a:p>
-            <a:pPr algn="l">
-              <a:spcAft>
-                <a:spcPts val="600"/>
-              </a:spcAft>
-            </a:pPr>
-            <a:r>
-              <a:rPr sz="1200">
-                <a:solidFill>
-                  <a:srgbClr val="212529"/>
-                </a:solidFill>
-                <a:latin typeface="Calibri"/>
-              </a:rPr>
-              <a:t>•  Стабільність при великій кількості сесій</a:t>
-            </a:r>
-          </a:p>
-          <a:p>
-            <a:pPr algn="l">
-              <a:spcAft>
-                <a:spcPts val="600"/>
-              </a:spcAft>
-            </a:pPr>
-            <a:r>
-              <a:rPr sz="1200">
-                <a:solidFill>
-                  <a:srgbClr val="212529"/>
-                </a:solidFill>
-                <a:latin typeface="Calibri"/>
-              </a:rPr>
-              <a:t>•  DHCP, NAT, маршрутизація між VLAN</a:t>
-            </a:r>
-          </a:p>
-        </p:txBody>
-      </p:sp>
-      <p:sp>
-        <p:nvSpPr>
-          <p:cNvPr id="8" name="TextBox 7"/>
-          <p:cNvSpPr txBox="1"/>
-          <p:nvPr/>
-        </p:nvSpPr>
-        <p:spPr>
-          <a:xfrm>
-            <a:off x="8138160" y="4114800"/>
-            <a:ext cx="3840480" cy="457200"/>
+            <a:off x="6217920" y="1783080"/>
+            <a:ext cx="5669280" cy="4937760"/>
           </a:xfrm>
           <a:prstGeom prst="rect">
             <a:avLst/>
@@ -5569,100 +6084,109 @@
           <a:p>
             <a:pPr algn="l"/>
             <a:r>
-              <a:rPr sz="1600" b="1">
-                <a:solidFill>
-                  <a:srgbClr val="36A2EB"/>
-                </a:solidFill>
-                <a:latin typeface="Calibri"/>
-              </a:rPr>
-              <a:t>D-Link DGS-1210 (L2)</a:t>
-            </a:r>
-          </a:p>
-        </p:txBody>
-      </p:sp>
-      <p:sp>
-        <p:nvSpPr>
-          <p:cNvPr id="9" name="TextBox 8"/>
-          <p:cNvSpPr txBox="1"/>
-          <p:nvPr/>
-        </p:nvSpPr>
-        <p:spPr>
-          <a:xfrm>
-            <a:off x="8138160" y="4572000"/>
-            <a:ext cx="3840480" cy="2286000"/>
-          </a:xfrm>
-          <a:prstGeom prst="rect">
-            <a:avLst/>
-          </a:prstGeom>
-          <a:noFill/>
-        </p:spPr>
-        <p:txBody>
-          <a:bodyPr wrap="square">
-            <a:spAutoFit/>
-          </a:bodyPr>
-          <a:lstStyle/>
-          <a:p>
-            <a:pPr algn="l">
-              <a:spcAft>
-                <a:spcPts val="600"/>
-              </a:spcAft>
-            </a:pPr>
-            <a:r>
-              <a:rPr sz="1200">
+              <a:rPr sz="1300" b="0" i="0">
                 <a:solidFill>
                   <a:srgbClr val="212529"/>
                 </a:solidFill>
                 <a:latin typeface="Calibri"/>
               </a:rPr>
-              <a:t>•  VLAN, QoS, Loopback Detection</a:t>
-            </a:r>
-          </a:p>
-          <a:p>
-            <a:pPr algn="l">
-              <a:spcAft>
-                <a:spcPts val="600"/>
-              </a:spcAft>
-            </a:pPr>
-            <a:r>
-              <a:rPr sz="1200">
+              <a:t>Локальна комп'ютерна мережа гуртожитків побудована для забезпечення стабільного доступу користувачів до мережі Інтернет та внутрішніх інформаційних ресурсів. Основу мережевої інфраструктури складають:</a:t>
+            </a:r>
+          </a:p>
+          <a:p>
+            <a:pPr algn="l"/>
+            <a:r>
+              <a:rPr sz="1300" b="0" i="0">
                 <a:solidFill>
                   <a:srgbClr val="212529"/>
                 </a:solidFill>
                 <a:latin typeface="Calibri"/>
               </a:rPr>
-              <a:t>•  Веб-інтерфейс адміністрування</a:t>
-            </a:r>
-          </a:p>
-          <a:p>
-            <a:pPr algn="l">
-              <a:spcAft>
-                <a:spcPts val="600"/>
-              </a:spcAft>
-            </a:pPr>
-            <a:r>
-              <a:rPr sz="1200">
+              <a:t/>
+            </a:r>
+          </a:p>
+          <a:p>
+            <a:pPr algn="l"/>
+            <a:r>
+              <a:rPr sz="1300" b="0" i="0">
                 <a:solidFill>
                   <a:srgbClr val="212529"/>
                 </a:solidFill>
                 <a:latin typeface="Calibri"/>
               </a:rPr>
-              <a:t>•  Моніторинг трафіку та MAC-таблиць</a:t>
-            </a:r>
-          </a:p>
-          <a:p>
-            <a:pPr algn="l">
-              <a:spcAft>
-                <a:spcPts val="600"/>
-              </a:spcAft>
-            </a:pPr>
-            <a:r>
-              <a:rPr sz="1200">
+              <a:t>• Центральний маршрутизатор MikroTik RB5009UG+S+IN</a:t>
+            </a:r>
+          </a:p>
+          <a:p>
+            <a:pPr algn="l"/>
+            <a:r>
+              <a:rPr sz="1300" b="0" i="0">
                 <a:solidFill>
                   <a:srgbClr val="212529"/>
                 </a:solidFill>
                 <a:latin typeface="Calibri"/>
               </a:rPr>
-              <a:t>•  Сегментація поверхів гуртожитків</a:t>
+              <a:t>• Керовані гігабітні комутатори D-Link DGS-1210 (L2)</a:t>
+            </a:r>
+          </a:p>
+          <a:p>
+            <a:pPr algn="l"/>
+            <a:r>
+              <a:rPr sz="1300" b="0" i="0">
+                <a:solidFill>
+                  <a:srgbClr val="212529"/>
+                </a:solidFill>
+                <a:latin typeface="Calibri"/>
+              </a:rPr>
+              <a:t>• Некеровані комутатори серій D-Link DES-1000 / 2000</a:t>
+            </a:r>
+          </a:p>
+          <a:p>
+            <a:pPr algn="l"/>
+            <a:r>
+              <a:rPr sz="1300" b="0" i="0">
+                <a:solidFill>
+                  <a:srgbClr val="212529"/>
+                </a:solidFill>
+                <a:latin typeface="Calibri"/>
+              </a:rPr>
+              <a:t>• Точки доступу Wi-Fi для гостьового сегмента</a:t>
+            </a:r>
+          </a:p>
+          <a:p>
+            <a:pPr algn="l"/>
+            <a:r>
+              <a:rPr sz="1300" b="0" i="0">
+                <a:solidFill>
+                  <a:srgbClr val="212529"/>
+                </a:solidFill>
+                <a:latin typeface="Calibri"/>
+              </a:rPr>
+              <a:t>• Магістральні trunk-канали між комутаторами доступу</a:t>
+            </a:r>
+          </a:p>
+          <a:p>
+            <a:pPr algn="l"/>
+            <a:r>
+              <a:rPr sz="1300" b="0" i="0">
+                <a:solidFill>
+                  <a:srgbClr val="212529"/>
+                </a:solidFill>
+                <a:latin typeface="Calibri"/>
+              </a:rPr>
+              <a:t/>
+            </a:r>
+          </a:p>
+          <a:p>
+            <a:pPr algn="l"/>
+            <a:r>
+              <a:rPr sz="1300" b="0" i="0">
+                <a:solidFill>
+                  <a:srgbClr val="212529"/>
+                </a:solidFill>
+                <a:latin typeface="Calibri"/>
+              </a:rPr>
+              <a:t>Логічне розділення користувачів реалізовано за допомогою технології VLAN, що дозволяє згрупувати пристрої незалежно від фізичного підключення та ізолювати трафік різних категорій користувачів.</a:t>
             </a:r>
           </a:p>
         </p:txBody>
@@ -5779,7 +6303,7 @@
         </p:nvSpPr>
         <p:spPr>
           <a:xfrm>
-            <a:off x="457200" y="228600"/>
+            <a:off x="457200" y="201168"/>
             <a:ext cx="11247120" cy="640080"/>
           </a:xfrm>
           <a:prstGeom prst="rect">
@@ -5795,51 +6319,178 @@
           <a:p>
             <a:pPr algn="l"/>
             <a:r>
-              <a:rPr sz="2800" b="1">
+              <a:rPr sz="2800" b="1" i="0">
                 <a:solidFill>
                   <a:srgbClr val="FFFFFF"/>
                 </a:solidFill>
                 <a:latin typeface="Calibri"/>
               </a:rPr>
-              <a:t>Розділ 2.1. Сегментація через VLAN</a:t>
-            </a:r>
-          </a:p>
-        </p:txBody>
-      </p:sp>
-      <p:pic>
-        <p:nvPicPr>
-          <p:cNvPr id="5" name="Picture 4" descr="vlan.png"/>
-          <p:cNvPicPr>
-            <a:picLocks noChangeAspect="1"/>
-          </p:cNvPicPr>
-          <p:nvPr/>
-        </p:nvPicPr>
-        <p:blipFill>
-          <a:blip r:embed="rId2"/>
-          <a:stretch>
-            <a:fillRect/>
-          </a:stretch>
-        </p:blipFill>
-        <p:spPr>
-          <a:xfrm>
-            <a:off x="274320" y="1280160"/>
-            <a:ext cx="6882938" cy="4206240"/>
-          </a:xfrm>
-          <a:prstGeom prst="rect">
-            <a:avLst/>
-          </a:prstGeom>
-        </p:spPr>
-      </p:pic>
-      <p:sp>
-        <p:nvSpPr>
-          <p:cNvPr id="6" name="TextBox 5"/>
+              <a:t>Аналіз мережевого обладнання</a:t>
+            </a:r>
+          </a:p>
+        </p:txBody>
+      </p:sp>
+      <p:sp>
+        <p:nvSpPr>
+          <p:cNvPr id="5" name="Rectangle 4"/>
+          <p:cNvSpPr/>
+          <p:nvPr/>
+        </p:nvSpPr>
+        <p:spPr>
+          <a:xfrm>
+            <a:off x="457200" y="1234440"/>
+            <a:ext cx="4572000" cy="5303520"/>
+          </a:xfrm>
+          <a:prstGeom prst="rect">
+            <a:avLst/>
+          </a:prstGeom>
+          <a:solidFill>
+            <a:srgbClr val="F4F6F9"/>
+          </a:solidFill>
+          <a:ln w="19050">
+            <a:solidFill>
+              <a:srgbClr val="B0B8C4"/>
+            </a:solidFill>
+            <a:prstDash val="lgDash"/>
+          </a:ln>
+        </p:spPr>
+        <p:style>
+          <a:lnRef idx="1">
+            <a:schemeClr val="accent1"/>
+          </a:lnRef>
+          <a:fillRef idx="3">
+            <a:schemeClr val="accent1"/>
+          </a:fillRef>
+          <a:effectRef idx="2">
+            <a:schemeClr val="accent1"/>
+          </a:effectRef>
+          <a:fontRef idx="minor">
+            <a:schemeClr val="lt1"/>
+          </a:fontRef>
+        </p:style>
+        <p:txBody>
+          <a:bodyPr rtlCol="0" anchor="ctr"/>
+          <a:lstStyle/>
+          <a:p>
+            <a:pPr algn="ctr"/>
+          </a:p>
+        </p:txBody>
+      </p:sp>
+      <p:cxnSp>
+        <p:nvCxnSpPr>
+          <p:cNvPr id="6" name="Connector 5"/>
+          <p:cNvCxnSpPr/>
+          <p:nvPr/>
+        </p:nvCxnSpPr>
+        <p:spPr>
+          <a:xfrm>
+            <a:off x="457200" y="1234440"/>
+            <a:ext cx="4572000" cy="5303520"/>
+          </a:xfrm>
+          <a:prstGeom prst="line">
+            <a:avLst/>
+          </a:prstGeom>
+          <a:ln w="9525">
+            <a:solidFill>
+              <a:srgbClr val="B0B8C4"/>
+            </a:solidFill>
+          </a:ln>
+        </p:spPr>
+        <p:style>
+          <a:lnRef idx="2">
+            <a:schemeClr val="accent1"/>
+          </a:lnRef>
+          <a:fillRef idx="0">
+            <a:schemeClr val="accent1"/>
+          </a:fillRef>
+          <a:effectRef idx="1">
+            <a:schemeClr val="accent1"/>
+          </a:effectRef>
+          <a:fontRef idx="minor">
+            <a:schemeClr val="tx1"/>
+          </a:fontRef>
+        </p:style>
+      </p:cxnSp>
+      <p:cxnSp>
+        <p:nvCxnSpPr>
+          <p:cNvPr id="7" name="Connector 6"/>
+          <p:cNvCxnSpPr/>
+          <p:nvPr/>
+        </p:nvCxnSpPr>
+        <p:spPr>
+          <a:xfrm flipH="1">
+            <a:off x="457200" y="1234440"/>
+            <a:ext cx="4572000" cy="5303520"/>
+          </a:xfrm>
+          <a:prstGeom prst="line">
+            <a:avLst/>
+          </a:prstGeom>
+          <a:ln w="9525">
+            <a:solidFill>
+              <a:srgbClr val="B0B8C4"/>
+            </a:solidFill>
+          </a:ln>
+        </p:spPr>
+        <p:style>
+          <a:lnRef idx="2">
+            <a:schemeClr val="accent1"/>
+          </a:lnRef>
+          <a:fillRef idx="0">
+            <a:schemeClr val="accent1"/>
+          </a:fillRef>
+          <a:effectRef idx="1">
+            <a:schemeClr val="accent1"/>
+          </a:effectRef>
+          <a:fontRef idx="minor">
+            <a:schemeClr val="tx1"/>
+          </a:fontRef>
+        </p:style>
+      </p:cxnSp>
+      <p:sp>
+        <p:nvSpPr>
+          <p:cNvPr id="8" name="TextBox 7"/>
           <p:cNvSpPr txBox="1"/>
           <p:nvPr/>
         </p:nvSpPr>
         <p:spPr>
           <a:xfrm>
-            <a:off x="7772400" y="1371600"/>
-            <a:ext cx="4206240" cy="457200"/>
+            <a:off x="457200" y="3703320"/>
+            <a:ext cx="4572000" cy="365760"/>
+          </a:xfrm>
+          <a:prstGeom prst="rect">
+            <a:avLst/>
+          </a:prstGeom>
+          <a:noFill/>
+        </p:spPr>
+        <p:txBody>
+          <a:bodyPr wrap="square">
+            <a:spAutoFit/>
+          </a:bodyPr>
+          <a:lstStyle/>
+          <a:p>
+            <a:pPr algn="ctr"/>
+            <a:r>
+              <a:rPr sz="1400" i="1">
+                <a:solidFill>
+                  <a:srgbClr val="6C757D"/>
+                </a:solidFill>
+                <a:latin typeface="Calibri"/>
+              </a:rPr>
+              <a:t>Фото маршрутизатора / комутатора</a:t>
+            </a:r>
+          </a:p>
+        </p:txBody>
+      </p:sp>
+      <p:sp>
+        <p:nvSpPr>
+          <p:cNvPr id="9" name="TextBox 8"/>
+          <p:cNvSpPr txBox="1"/>
+          <p:nvPr/>
+        </p:nvSpPr>
+        <p:spPr>
+          <a:xfrm>
+            <a:off x="5303520" y="1280160"/>
+            <a:ext cx="6583680" cy="457200"/>
           </a:xfrm>
           <a:prstGeom prst="rect">
             <a:avLst/>
@@ -5854,444 +6505,27 @@
           <a:p>
             <a:pPr algn="l"/>
             <a:r>
-              <a:rPr sz="1600" b="1">
+              <a:rPr sz="1600" b="1" i="0">
                 <a:solidFill>
                   <a:srgbClr val="204982"/>
                 </a:solidFill>
                 <a:latin typeface="Calibri"/>
               </a:rPr>
-              <a:t>Таблиця VLAN мережі</a:t>
-            </a:r>
-          </a:p>
-        </p:txBody>
-      </p:sp>
-      <p:graphicFrame>
-        <p:nvGraphicFramePr>
-          <p:cNvPr id="7" name="Table 6"/>
-          <p:cNvGraphicFramePr>
-            <a:graphicFrameLocks noGrp="1"/>
-          </p:cNvGraphicFramePr>
-          <p:nvPr/>
-        </p:nvGraphicFramePr>
-        <p:xfrm>
-          <a:off x="7772400" y="1874519"/>
-          <a:ext cx="4206240" cy="2743200"/>
-        </p:xfrm>
-        <a:graphic>
-          <a:graphicData uri="http://schemas.openxmlformats.org/drawingml/2006/table">
-            <a:tbl>
-              <a:tblPr firstRow="1" bandRow="1">
-                <a:tableStyleId>{5C22544A-7EE6-4342-B048-85BDC9FD1C3A}</a:tableStyleId>
-              </a:tblPr>
-              <a:tblGrid>
-                <a:gridCol w="1402080"/>
-                <a:gridCol w="1402080"/>
-                <a:gridCol w="1402080"/>
-              </a:tblGrid>
-              <a:tr h="457200">
-                <a:tc>
-                  <a:txBody>
-                    <a:bodyPr/>
-                    <a:lstStyle/>
-                    <a:p>
-                      <a:r>
-                        <a:rPr sz="1100" b="1">
-                          <a:solidFill>
-                            <a:srgbClr val="FFFFFF"/>
-                          </a:solidFill>
-                        </a:rPr>
-                        <a:t>VLAN</a:t>
-                      </a:r>
-                    </a:p>
-                  </a:txBody>
-                  <a:tcPr>
-                    <a:solidFill>
-                      <a:srgbClr val="204982"/>
-                    </a:solidFill>
-                  </a:tcPr>
-                </a:tc>
-                <a:tc>
-                  <a:txBody>
-                    <a:bodyPr/>
-                    <a:lstStyle/>
-                    <a:p>
-                      <a:r>
-                        <a:rPr sz="1100" b="1">
-                          <a:solidFill>
-                            <a:srgbClr val="FFFFFF"/>
-                          </a:solidFill>
-                        </a:rPr>
-                        <a:t>Призначення</a:t>
-                      </a:r>
-                    </a:p>
-                  </a:txBody>
-                  <a:tcPr>
-                    <a:solidFill>
-                      <a:srgbClr val="204982"/>
-                    </a:solidFill>
-                  </a:tcPr>
-                </a:tc>
-                <a:tc>
-                  <a:txBody>
-                    <a:bodyPr/>
-                    <a:lstStyle/>
-                    <a:p>
-                      <a:r>
-                        <a:rPr sz="1100" b="1">
-                          <a:solidFill>
-                            <a:srgbClr val="FFFFFF"/>
-                          </a:solidFill>
-                        </a:rPr>
-                        <a:t>Підмережа</a:t>
-                      </a:r>
-                    </a:p>
-                  </a:txBody>
-                  <a:tcPr>
-                    <a:solidFill>
-                      <a:srgbClr val="204982"/>
-                    </a:solidFill>
-                  </a:tcPr>
-                </a:tc>
-              </a:tr>
-              <a:tr h="457200">
-                <a:tc>
-                  <a:txBody>
-                    <a:bodyPr/>
-                    <a:lstStyle/>
-                    <a:p>
-                      <a:r>
-                        <a:rPr sz="1100">
-                          <a:solidFill>
-                            <a:srgbClr val="212529"/>
-                          </a:solidFill>
-                        </a:rPr>
-                        <a:t>10</a:t>
-                      </a:r>
-                    </a:p>
-                  </a:txBody>
-                  <a:tcPr>
-                    <a:solidFill>
-                      <a:srgbClr val="EBF2FA"/>
-                    </a:solidFill>
-                  </a:tcPr>
-                </a:tc>
-                <a:tc>
-                  <a:txBody>
-                    <a:bodyPr/>
-                    <a:lstStyle/>
-                    <a:p>
-                      <a:r>
-                        <a:rPr sz="1100">
-                          <a:solidFill>
-                            <a:srgbClr val="212529"/>
-                          </a:solidFill>
-                        </a:rPr>
-                        <a:t>ADMIN</a:t>
-                      </a:r>
-                    </a:p>
-                  </a:txBody>
-                  <a:tcPr>
-                    <a:solidFill>
-                      <a:srgbClr val="EBF2FA"/>
-                    </a:solidFill>
-                  </a:tcPr>
-                </a:tc>
-                <a:tc>
-                  <a:txBody>
-                    <a:bodyPr/>
-                    <a:lstStyle/>
-                    <a:p>
-                      <a:r>
-                        <a:rPr sz="1100">
-                          <a:solidFill>
-                            <a:srgbClr val="212529"/>
-                          </a:solidFill>
-                        </a:rPr>
-                        <a:t>192.168.10.0/24</a:t>
-                      </a:r>
-                    </a:p>
-                  </a:txBody>
-                  <a:tcPr>
-                    <a:solidFill>
-                      <a:srgbClr val="EBF2FA"/>
-                    </a:solidFill>
-                  </a:tcPr>
-                </a:tc>
-              </a:tr>
-              <a:tr h="457200">
-                <a:tc>
-                  <a:txBody>
-                    <a:bodyPr/>
-                    <a:lstStyle/>
-                    <a:p>
-                      <a:r>
-                        <a:rPr sz="1100">
-                          <a:solidFill>
-                            <a:srgbClr val="212529"/>
-                          </a:solidFill>
-                        </a:rPr>
-                        <a:t>20</a:t>
-                      </a:r>
-                    </a:p>
-                  </a:txBody>
-                  <a:tcPr>
-                    <a:solidFill>
-                      <a:srgbClr val="FFFFFF"/>
-                    </a:solidFill>
-                  </a:tcPr>
-                </a:tc>
-                <a:tc>
-                  <a:txBody>
-                    <a:bodyPr/>
-                    <a:lstStyle/>
-                    <a:p>
-                      <a:r>
-                        <a:rPr sz="1100">
-                          <a:solidFill>
-                            <a:srgbClr val="212529"/>
-                          </a:solidFill>
-                        </a:rPr>
-                        <a:t>Students</a:t>
-                      </a:r>
-                    </a:p>
-                  </a:txBody>
-                  <a:tcPr>
-                    <a:solidFill>
-                      <a:srgbClr val="FFFFFF"/>
-                    </a:solidFill>
-                  </a:tcPr>
-                </a:tc>
-                <a:tc>
-                  <a:txBody>
-                    <a:bodyPr/>
-                    <a:lstStyle/>
-                    <a:p>
-                      <a:r>
-                        <a:rPr sz="1100">
-                          <a:solidFill>
-                            <a:srgbClr val="212529"/>
-                          </a:solidFill>
-                        </a:rPr>
-                        <a:t>192.168.20.0/24</a:t>
-                      </a:r>
-                    </a:p>
-                  </a:txBody>
-                  <a:tcPr>
-                    <a:solidFill>
-                      <a:srgbClr val="FFFFFF"/>
-                    </a:solidFill>
-                  </a:tcPr>
-                </a:tc>
-              </a:tr>
-              <a:tr h="457200">
-                <a:tc>
-                  <a:txBody>
-                    <a:bodyPr/>
-                    <a:lstStyle/>
-                    <a:p>
-                      <a:r>
-                        <a:rPr sz="1100">
-                          <a:solidFill>
-                            <a:srgbClr val="212529"/>
-                          </a:solidFill>
-                        </a:rPr>
-                        <a:t>30</a:t>
-                      </a:r>
-                    </a:p>
-                  </a:txBody>
-                  <a:tcPr>
-                    <a:solidFill>
-                      <a:srgbClr val="EBF2FA"/>
-                    </a:solidFill>
-                  </a:tcPr>
-                </a:tc>
-                <a:tc>
-                  <a:txBody>
-                    <a:bodyPr/>
-                    <a:lstStyle/>
-                    <a:p>
-                      <a:r>
-                        <a:rPr sz="1100">
-                          <a:solidFill>
-                            <a:srgbClr val="212529"/>
-                          </a:solidFill>
-                        </a:rPr>
-                        <a:t>Guest (Wi-Fi)</a:t>
-                      </a:r>
-                    </a:p>
-                  </a:txBody>
-                  <a:tcPr>
-                    <a:solidFill>
-                      <a:srgbClr val="EBF2FA"/>
-                    </a:solidFill>
-                  </a:tcPr>
-                </a:tc>
-                <a:tc>
-                  <a:txBody>
-                    <a:bodyPr/>
-                    <a:lstStyle/>
-                    <a:p>
-                      <a:r>
-                        <a:rPr sz="1100">
-                          <a:solidFill>
-                            <a:srgbClr val="212529"/>
-                          </a:solidFill>
-                        </a:rPr>
-                        <a:t>192.168.30.0/24</a:t>
-                      </a:r>
-                    </a:p>
-                  </a:txBody>
-                  <a:tcPr>
-                    <a:solidFill>
-                      <a:srgbClr val="EBF2FA"/>
-                    </a:solidFill>
-                  </a:tcPr>
-                </a:tc>
-              </a:tr>
-              <a:tr h="457200">
-                <a:tc>
-                  <a:txBody>
-                    <a:bodyPr/>
-                    <a:lstStyle/>
-                    <a:p>
-                      <a:r>
-                        <a:rPr sz="1100">
-                          <a:solidFill>
-                            <a:srgbClr val="212529"/>
-                          </a:solidFill>
-                        </a:rPr>
-                        <a:t>40</a:t>
-                      </a:r>
-                    </a:p>
-                  </a:txBody>
-                  <a:tcPr>
-                    <a:solidFill>
-                      <a:srgbClr val="FFFFFF"/>
-                    </a:solidFill>
-                  </a:tcPr>
-                </a:tc>
-                <a:tc>
-                  <a:txBody>
-                    <a:bodyPr/>
-                    <a:lstStyle/>
-                    <a:p>
-                      <a:r>
-                        <a:rPr sz="1100">
-                          <a:solidFill>
-                            <a:srgbClr val="212529"/>
-                          </a:solidFill>
-                        </a:rPr>
-                        <a:t>Services</a:t>
-                      </a:r>
-                    </a:p>
-                  </a:txBody>
-                  <a:tcPr>
-                    <a:solidFill>
-                      <a:srgbClr val="FFFFFF"/>
-                    </a:solidFill>
-                  </a:tcPr>
-                </a:tc>
-                <a:tc>
-                  <a:txBody>
-                    <a:bodyPr/>
-                    <a:lstStyle/>
-                    <a:p>
-                      <a:r>
-                        <a:rPr sz="1100">
-                          <a:solidFill>
-                            <a:srgbClr val="212529"/>
-                          </a:solidFill>
-                        </a:rPr>
-                        <a:t>192.168.40.0/24</a:t>
-                      </a:r>
-                    </a:p>
-                  </a:txBody>
-                  <a:tcPr>
-                    <a:solidFill>
-                      <a:srgbClr val="FFFFFF"/>
-                    </a:solidFill>
-                  </a:tcPr>
-                </a:tc>
-              </a:tr>
-              <a:tr h="457200">
-                <a:tc>
-                  <a:txBody>
-                    <a:bodyPr/>
-                    <a:lstStyle/>
-                    <a:p>
-                      <a:r>
-                        <a:rPr sz="1100">
-                          <a:solidFill>
-                            <a:srgbClr val="212529"/>
-                          </a:solidFill>
-                        </a:rPr>
-                        <a:t>99</a:t>
-                      </a:r>
-                    </a:p>
-                  </a:txBody>
-                  <a:tcPr>
-                    <a:solidFill>
-                      <a:srgbClr val="EBF2FA"/>
-                    </a:solidFill>
-                  </a:tcPr>
-                </a:tc>
-                <a:tc>
-                  <a:txBody>
-                    <a:bodyPr/>
-                    <a:lstStyle/>
-                    <a:p>
-                      <a:r>
-                        <a:rPr sz="1100">
-                          <a:solidFill>
-                            <a:srgbClr val="212529"/>
-                          </a:solidFill>
-                        </a:rPr>
-                        <a:t>Management</a:t>
-                      </a:r>
-                    </a:p>
-                  </a:txBody>
-                  <a:tcPr>
-                    <a:solidFill>
-                      <a:srgbClr val="EBF2FA"/>
-                    </a:solidFill>
-                  </a:tcPr>
-                </a:tc>
-                <a:tc>
-                  <a:txBody>
-                    <a:bodyPr/>
-                    <a:lstStyle/>
-                    <a:p>
-                      <a:r>
-                        <a:rPr sz="1100">
-                          <a:solidFill>
-                            <a:srgbClr val="212529"/>
-                          </a:solidFill>
-                        </a:rPr>
-                        <a:t>192.168.99.0/24</a:t>
-                      </a:r>
-                    </a:p>
-                  </a:txBody>
-                  <a:tcPr>
-                    <a:solidFill>
-                      <a:srgbClr val="EBF2FA"/>
-                    </a:solidFill>
-                  </a:tcPr>
-                </a:tc>
-              </a:tr>
-            </a:tbl>
-          </a:graphicData>
-        </a:graphic>
-      </p:graphicFrame>
-      <p:sp>
-        <p:nvSpPr>
-          <p:cNvPr id="8" name="TextBox 7"/>
+              <a:t>MikroTik RB5009UG+S+IN — центральний вузол</a:t>
+            </a:r>
+          </a:p>
+        </p:txBody>
+      </p:sp>
+      <p:sp>
+        <p:nvSpPr>
+          <p:cNvPr id="10" name="TextBox 9"/>
           <p:cNvSpPr txBox="1"/>
           <p:nvPr/>
         </p:nvSpPr>
         <p:spPr>
           <a:xfrm>
-            <a:off x="7772400" y="4937760"/>
-            <a:ext cx="4206240" cy="1371600"/>
+            <a:off x="5303520" y="1691640"/>
+            <a:ext cx="6583680" cy="1828800"/>
           </a:xfrm>
           <a:prstGeom prst="rect">
             <a:avLst/>
@@ -6306,25 +6540,83 @@
           <a:p>
             <a:pPr algn="l"/>
             <a:r>
-              <a:rPr sz="1200" b="0">
-                <a:solidFill>
-                  <a:srgbClr val="6C757D"/>
-                </a:solidFill>
-                <a:latin typeface="Calibri"/>
-              </a:rPr>
-              <a:t>Маршрутизація між VLAN — на MikroTik</a:t>
-            </a:r>
-          </a:p>
+              <a:rPr sz="1200" b="0" i="0">
+                <a:solidFill>
+                  <a:srgbClr val="212529"/>
+                </a:solidFill>
+                <a:latin typeface="Calibri"/>
+              </a:rPr>
+              <a:t>Високопродуктивний маршрутизатор з чотириядерним CPU та великим об'ємом оперативної пам'яті. 8× гігабітних Ethernet-портів і один порт 10G SFP+ дозволяють стабільно обслуговувати велику кількість одночасних сесій у мережі гуртожитку та забезпечують швидкісну передачу даних між зовнішнім каналом Інтернет та внутрішньою мережею.</a:t>
+            </a:r>
+          </a:p>
+        </p:txBody>
+      </p:sp>
+      <p:sp>
+        <p:nvSpPr>
+          <p:cNvPr id="11" name="TextBox 10"/>
+          <p:cNvSpPr txBox="1"/>
+          <p:nvPr/>
+        </p:nvSpPr>
+        <p:spPr>
+          <a:xfrm>
+            <a:off x="5303520" y="3703320"/>
+            <a:ext cx="6583680" cy="457200"/>
+          </a:xfrm>
+          <a:prstGeom prst="rect">
+            <a:avLst/>
+          </a:prstGeom>
+          <a:noFill/>
+        </p:spPr>
+        <p:txBody>
+          <a:bodyPr wrap="square" lIns="0" rIns="0" tIns="0" bIns="0">
+            <a:spAutoFit/>
+          </a:bodyPr>
+          <a:lstStyle/>
           <a:p>
             <a:pPr algn="l"/>
             <a:r>
-              <a:rPr sz="1200" b="0">
-                <a:solidFill>
-                  <a:srgbClr val="6C757D"/>
-                </a:solidFill>
-                <a:latin typeface="Calibri"/>
-              </a:rPr>
-              <a:t>з тегуванням 802.1Q (subinterfaces).</a:t>
+              <a:rPr sz="1600" b="1" i="0">
+                <a:solidFill>
+                  <a:srgbClr val="36A2EB"/>
+                </a:solidFill>
+                <a:latin typeface="Calibri"/>
+              </a:rPr>
+              <a:t>D-Link DGS-1210 — керовані комутатори доступу</a:t>
+            </a:r>
+          </a:p>
+        </p:txBody>
+      </p:sp>
+      <p:sp>
+        <p:nvSpPr>
+          <p:cNvPr id="12" name="TextBox 11"/>
+          <p:cNvSpPr txBox="1"/>
+          <p:nvPr/>
+        </p:nvSpPr>
+        <p:spPr>
+          <a:xfrm>
+            <a:off x="5303520" y="4114800"/>
+            <a:ext cx="6583680" cy="2286000"/>
+          </a:xfrm>
+          <a:prstGeom prst="rect">
+            <a:avLst/>
+          </a:prstGeom>
+          <a:noFill/>
+        </p:spPr>
+        <p:txBody>
+          <a:bodyPr wrap="square" lIns="0" rIns="0" tIns="0" bIns="0">
+            <a:spAutoFit/>
+          </a:bodyPr>
+          <a:lstStyle/>
+          <a:p>
+            <a:pPr algn="l"/>
+            <a:r>
+              <a:rPr sz="1200" b="0" i="0">
+                <a:solidFill>
+                  <a:srgbClr val="212529"/>
+                </a:solidFill>
+                <a:latin typeface="Calibri"/>
+              </a:rPr>
+              <a:t>Керовані гігабітні комутатори рівня L2. Підтримують технології VLAN, QoS, Loopback Detection та моніторинг мережевого трафіку. Використовуються для сегментації мережі та підключення великої кількості користувачів у межах окремих поверхів гуртожитків. Налаштування виконується через зручний веб-інтерфейс. Для базових потреб у мережі також використовуються некеровані комутатори серій DES-1000 / 2000.</a:t>
             </a:r>
           </a:p>
         </p:txBody>
@@ -6441,7 +6733,7 @@
         </p:nvSpPr>
         <p:spPr>
           <a:xfrm>
-            <a:off x="457200" y="228600"/>
+            <a:off x="457200" y="201168"/>
             <a:ext cx="11247120" cy="640080"/>
           </a:xfrm>
           <a:prstGeom prst="rect">
@@ -6457,51 +6749,27 @@
           <a:p>
             <a:pPr algn="l"/>
             <a:r>
-              <a:rPr sz="2800" b="1">
+              <a:rPr sz="2800" b="1" i="0">
                 <a:solidFill>
                   <a:srgbClr val="FFFFFF"/>
                 </a:solidFill>
                 <a:latin typeface="Calibri"/>
               </a:rPr>
-              <a:t>Розділ 2.2. AAA та TACACS+</a:t>
-            </a:r>
-          </a:p>
-        </p:txBody>
-      </p:sp>
-      <p:pic>
-        <p:nvPicPr>
-          <p:cNvPr id="5" name="Picture 4" descr="aaa.png"/>
-          <p:cNvPicPr>
-            <a:picLocks noChangeAspect="1"/>
-          </p:cNvPicPr>
-          <p:nvPr/>
-        </p:nvPicPr>
-        <p:blipFill>
-          <a:blip r:embed="rId2"/>
-          <a:stretch>
-            <a:fillRect/>
-          </a:stretch>
-        </p:blipFill>
-        <p:spPr>
-          <a:xfrm>
-            <a:off x="365760" y="1188720"/>
-            <a:ext cx="6858000" cy="3810000"/>
-          </a:xfrm>
-          <a:prstGeom prst="rect">
-            <a:avLst/>
-          </a:prstGeom>
-        </p:spPr>
-      </p:pic>
-      <p:sp>
-        <p:nvSpPr>
-          <p:cNvPr id="6" name="TextBox 5"/>
+              <a:t>Розділ 2.1. Налаштування VLAN та параметрів доступу</a:t>
+            </a:r>
+          </a:p>
+        </p:txBody>
+      </p:sp>
+      <p:sp>
+        <p:nvSpPr>
+          <p:cNvPr id="5" name="TextBox 4"/>
           <p:cNvSpPr txBox="1"/>
           <p:nvPr/>
         </p:nvSpPr>
         <p:spPr>
           <a:xfrm>
-            <a:off x="7589520" y="1280160"/>
-            <a:ext cx="4389120" cy="457200"/>
+            <a:off x="457200" y="1234440"/>
+            <a:ext cx="7315200" cy="457200"/>
           </a:xfrm>
           <a:prstGeom prst="rect">
             <a:avLst/>
@@ -6516,27 +6784,746 @@
           <a:p>
             <a:pPr algn="l"/>
             <a:r>
-              <a:rPr sz="1600" b="1">
+              <a:rPr sz="1800" b="1" i="0">
                 <a:solidFill>
                   <a:srgbClr val="204982"/>
                 </a:solidFill>
                 <a:latin typeface="Calibri"/>
               </a:rPr>
-              <a:t>Навіщо потрібен TACACS+?</a:t>
-            </a:r>
-          </a:p>
-        </p:txBody>
-      </p:sp>
-      <p:sp>
-        <p:nvSpPr>
-          <p:cNvPr id="7" name="TextBox 6"/>
+              <a:t>Логічне розділення мережі</a:t>
+            </a:r>
+          </a:p>
+        </p:txBody>
+      </p:sp>
+      <p:sp>
+        <p:nvSpPr>
+          <p:cNvPr id="6" name="TextBox 5"/>
           <p:cNvSpPr txBox="1"/>
           <p:nvPr/>
         </p:nvSpPr>
         <p:spPr>
           <a:xfrm>
-            <a:off x="7589520" y="1737360"/>
-            <a:ext cx="4389120" cy="4572000"/>
+            <a:off x="457200" y="1691640"/>
+            <a:ext cx="7315200" cy="1463040"/>
+          </a:xfrm>
+          <a:prstGeom prst="rect">
+            <a:avLst/>
+          </a:prstGeom>
+          <a:noFill/>
+        </p:spPr>
+        <p:txBody>
+          <a:bodyPr wrap="square" lIns="0" rIns="0" tIns="0" bIns="0">
+            <a:spAutoFit/>
+          </a:bodyPr>
+          <a:lstStyle/>
+          <a:p>
+            <a:pPr algn="l"/>
+            <a:r>
+              <a:rPr sz="1300" b="0" i="0">
+                <a:solidFill>
+                  <a:srgbClr val="212529"/>
+                </a:solidFill>
+                <a:latin typeface="Calibri"/>
+              </a:rPr>
+              <a:t>На початку налаштувань виконувалося планування VLAN: для кожного сегмента визначалось логічне призначення та діапазон IP-адрес. Комутатори доступу підключені до магістрального комутатора через trunk-порти, а маршрутизація між VLAN виконується на MikroTik із створенням підінтерфейсів з тегуванням 802.1Q.</a:t>
+            </a:r>
+          </a:p>
+        </p:txBody>
+      </p:sp>
+      <p:graphicFrame>
+        <p:nvGraphicFramePr>
+          <p:cNvPr id="7" name="Table 6"/>
+          <p:cNvGraphicFramePr>
+            <a:graphicFrameLocks noGrp="1"/>
+          </p:cNvGraphicFramePr>
+          <p:nvPr/>
+        </p:nvGraphicFramePr>
+        <p:xfrm>
+          <a:off x="457200" y="3291840"/>
+          <a:ext cx="7315200" cy="2834640"/>
+        </p:xfrm>
+        <a:graphic>
+          <a:graphicData uri="http://schemas.openxmlformats.org/drawingml/2006/table">
+            <a:tbl>
+              <a:tblPr firstRow="1" bandRow="1">
+                <a:tableStyleId>{5C22544A-7EE6-4342-B048-85BDC9FD1C3A}</a:tableStyleId>
+              </a:tblPr>
+              <a:tblGrid>
+                <a:gridCol w="1828800"/>
+                <a:gridCol w="1828800"/>
+                <a:gridCol w="1828800"/>
+                <a:gridCol w="1828800"/>
+              </a:tblGrid>
+              <a:tr h="472440">
+                <a:tc>
+                  <a:txBody>
+                    <a:bodyPr/>
+                    <a:lstStyle/>
+                    <a:p>
+                      <a:r>
+                        <a:rPr sz="1200" b="1">
+                          <a:solidFill>
+                            <a:srgbClr val="FFFFFF"/>
+                          </a:solidFill>
+                          <a:latin typeface="Calibri"/>
+                        </a:rPr>
+                        <a:t>VLAN ID</a:t>
+                      </a:r>
+                    </a:p>
+                  </a:txBody>
+                  <a:tcPr>
+                    <a:solidFill>
+                      <a:srgbClr val="204982"/>
+                    </a:solidFill>
+                  </a:tcPr>
+                </a:tc>
+                <a:tc>
+                  <a:txBody>
+                    <a:bodyPr/>
+                    <a:lstStyle/>
+                    <a:p>
+                      <a:r>
+                        <a:rPr sz="1200" b="1">
+                          <a:solidFill>
+                            <a:srgbClr val="FFFFFF"/>
+                          </a:solidFill>
+                          <a:latin typeface="Calibri"/>
+                        </a:rPr>
+                        <a:t>Назва</a:t>
+                      </a:r>
+                    </a:p>
+                  </a:txBody>
+                  <a:tcPr>
+                    <a:solidFill>
+                      <a:srgbClr val="204982"/>
+                    </a:solidFill>
+                  </a:tcPr>
+                </a:tc>
+                <a:tc>
+                  <a:txBody>
+                    <a:bodyPr/>
+                    <a:lstStyle/>
+                    <a:p>
+                      <a:r>
+                        <a:rPr sz="1200" b="1">
+                          <a:solidFill>
+                            <a:srgbClr val="FFFFFF"/>
+                          </a:solidFill>
+                          <a:latin typeface="Calibri"/>
+                        </a:rPr>
+                        <a:t>Призначення</a:t>
+                      </a:r>
+                    </a:p>
+                  </a:txBody>
+                  <a:tcPr>
+                    <a:solidFill>
+                      <a:srgbClr val="204982"/>
+                    </a:solidFill>
+                  </a:tcPr>
+                </a:tc>
+                <a:tc>
+                  <a:txBody>
+                    <a:bodyPr/>
+                    <a:lstStyle/>
+                    <a:p>
+                      <a:r>
+                        <a:rPr sz="1200" b="1">
+                          <a:solidFill>
+                            <a:srgbClr val="FFFFFF"/>
+                          </a:solidFill>
+                          <a:latin typeface="Calibri"/>
+                        </a:rPr>
+                        <a:t>Діапазон IP-адрес</a:t>
+                      </a:r>
+                    </a:p>
+                  </a:txBody>
+                  <a:tcPr>
+                    <a:solidFill>
+                      <a:srgbClr val="204982"/>
+                    </a:solidFill>
+                  </a:tcPr>
+                </a:tc>
+              </a:tr>
+              <a:tr h="472440">
+                <a:tc>
+                  <a:txBody>
+                    <a:bodyPr/>
+                    <a:lstStyle/>
+                    <a:p>
+                      <a:r>
+                        <a:rPr sz="1200">
+                          <a:solidFill>
+                            <a:srgbClr val="212529"/>
+                          </a:solidFill>
+                          <a:latin typeface="Calibri"/>
+                        </a:rPr>
+                        <a:t>10</a:t>
+                      </a:r>
+                    </a:p>
+                  </a:txBody>
+                  <a:tcPr>
+                    <a:solidFill>
+                      <a:srgbClr val="EBF2FA"/>
+                    </a:solidFill>
+                  </a:tcPr>
+                </a:tc>
+                <a:tc>
+                  <a:txBody>
+                    <a:bodyPr/>
+                    <a:lstStyle/>
+                    <a:p>
+                      <a:r>
+                        <a:rPr sz="1200">
+                          <a:solidFill>
+                            <a:srgbClr val="212529"/>
+                          </a:solidFill>
+                          <a:latin typeface="Calibri"/>
+                        </a:rPr>
+                        <a:t>ADMIN</a:t>
+                      </a:r>
+                    </a:p>
+                  </a:txBody>
+                  <a:tcPr>
+                    <a:solidFill>
+                      <a:srgbClr val="EBF2FA"/>
+                    </a:solidFill>
+                  </a:tcPr>
+                </a:tc>
+                <a:tc>
+                  <a:txBody>
+                    <a:bodyPr/>
+                    <a:lstStyle/>
+                    <a:p>
+                      <a:r>
+                        <a:rPr sz="1200">
+                          <a:solidFill>
+                            <a:srgbClr val="212529"/>
+                          </a:solidFill>
+                          <a:latin typeface="Calibri"/>
+                        </a:rPr>
+                        <a:t>Адміністрація</a:t>
+                      </a:r>
+                    </a:p>
+                  </a:txBody>
+                  <a:tcPr>
+                    <a:solidFill>
+                      <a:srgbClr val="EBF2FA"/>
+                    </a:solidFill>
+                  </a:tcPr>
+                </a:tc>
+                <a:tc>
+                  <a:txBody>
+                    <a:bodyPr/>
+                    <a:lstStyle/>
+                    <a:p>
+                      <a:r>
+                        <a:rPr sz="1200">
+                          <a:solidFill>
+                            <a:srgbClr val="212529"/>
+                          </a:solidFill>
+                          <a:latin typeface="Calibri"/>
+                        </a:rPr>
+                        <a:t>192.168.10.0/24</a:t>
+                      </a:r>
+                    </a:p>
+                  </a:txBody>
+                  <a:tcPr>
+                    <a:solidFill>
+                      <a:srgbClr val="EBF2FA"/>
+                    </a:solidFill>
+                  </a:tcPr>
+                </a:tc>
+              </a:tr>
+              <a:tr h="472440">
+                <a:tc>
+                  <a:txBody>
+                    <a:bodyPr/>
+                    <a:lstStyle/>
+                    <a:p>
+                      <a:r>
+                        <a:rPr sz="1200">
+                          <a:solidFill>
+                            <a:srgbClr val="212529"/>
+                          </a:solidFill>
+                          <a:latin typeface="Calibri"/>
+                        </a:rPr>
+                        <a:t>20</a:t>
+                      </a:r>
+                    </a:p>
+                  </a:txBody>
+                  <a:tcPr>
+                    <a:solidFill>
+                      <a:srgbClr val="FFFFFF"/>
+                    </a:solidFill>
+                  </a:tcPr>
+                </a:tc>
+                <a:tc>
+                  <a:txBody>
+                    <a:bodyPr/>
+                    <a:lstStyle/>
+                    <a:p>
+                      <a:r>
+                        <a:rPr sz="1200">
+                          <a:solidFill>
+                            <a:srgbClr val="212529"/>
+                          </a:solidFill>
+                          <a:latin typeface="Calibri"/>
+                        </a:rPr>
+                        <a:t>Students</a:t>
+                      </a:r>
+                    </a:p>
+                  </a:txBody>
+                  <a:tcPr>
+                    <a:solidFill>
+                      <a:srgbClr val="FFFFFF"/>
+                    </a:solidFill>
+                  </a:tcPr>
+                </a:tc>
+                <a:tc>
+                  <a:txBody>
+                    <a:bodyPr/>
+                    <a:lstStyle/>
+                    <a:p>
+                      <a:r>
+                        <a:rPr sz="1200">
+                          <a:solidFill>
+                            <a:srgbClr val="212529"/>
+                          </a:solidFill>
+                          <a:latin typeface="Calibri"/>
+                        </a:rPr>
+                        <a:t>Користувачі гуртожитку</a:t>
+                      </a:r>
+                    </a:p>
+                  </a:txBody>
+                  <a:tcPr>
+                    <a:solidFill>
+                      <a:srgbClr val="FFFFFF"/>
+                    </a:solidFill>
+                  </a:tcPr>
+                </a:tc>
+                <a:tc>
+                  <a:txBody>
+                    <a:bodyPr/>
+                    <a:lstStyle/>
+                    <a:p>
+                      <a:r>
+                        <a:rPr sz="1200">
+                          <a:solidFill>
+                            <a:srgbClr val="212529"/>
+                          </a:solidFill>
+                          <a:latin typeface="Calibri"/>
+                        </a:rPr>
+                        <a:t>192.168.20.0/24</a:t>
+                      </a:r>
+                    </a:p>
+                  </a:txBody>
+                  <a:tcPr>
+                    <a:solidFill>
+                      <a:srgbClr val="FFFFFF"/>
+                    </a:solidFill>
+                  </a:tcPr>
+                </a:tc>
+              </a:tr>
+              <a:tr h="472440">
+                <a:tc>
+                  <a:txBody>
+                    <a:bodyPr/>
+                    <a:lstStyle/>
+                    <a:p>
+                      <a:r>
+                        <a:rPr sz="1200">
+                          <a:solidFill>
+                            <a:srgbClr val="212529"/>
+                          </a:solidFill>
+                          <a:latin typeface="Calibri"/>
+                        </a:rPr>
+                        <a:t>30</a:t>
+                      </a:r>
+                    </a:p>
+                  </a:txBody>
+                  <a:tcPr>
+                    <a:solidFill>
+                      <a:srgbClr val="EBF2FA"/>
+                    </a:solidFill>
+                  </a:tcPr>
+                </a:tc>
+                <a:tc>
+                  <a:txBody>
+                    <a:bodyPr/>
+                    <a:lstStyle/>
+                    <a:p>
+                      <a:r>
+                        <a:rPr sz="1200">
+                          <a:solidFill>
+                            <a:srgbClr val="212529"/>
+                          </a:solidFill>
+                          <a:latin typeface="Calibri"/>
+                        </a:rPr>
+                        <a:t>Guest</a:t>
+                      </a:r>
+                    </a:p>
+                  </a:txBody>
+                  <a:tcPr>
+                    <a:solidFill>
+                      <a:srgbClr val="EBF2FA"/>
+                    </a:solidFill>
+                  </a:tcPr>
+                </a:tc>
+                <a:tc>
+                  <a:txBody>
+                    <a:bodyPr/>
+                    <a:lstStyle/>
+                    <a:p>
+                      <a:r>
+                        <a:rPr sz="1200">
+                          <a:solidFill>
+                            <a:srgbClr val="212529"/>
+                          </a:solidFill>
+                          <a:latin typeface="Calibri"/>
+                        </a:rPr>
+                        <a:t>Гості (Wi-Fi)</a:t>
+                      </a:r>
+                    </a:p>
+                  </a:txBody>
+                  <a:tcPr>
+                    <a:solidFill>
+                      <a:srgbClr val="EBF2FA"/>
+                    </a:solidFill>
+                  </a:tcPr>
+                </a:tc>
+                <a:tc>
+                  <a:txBody>
+                    <a:bodyPr/>
+                    <a:lstStyle/>
+                    <a:p>
+                      <a:r>
+                        <a:rPr sz="1200">
+                          <a:solidFill>
+                            <a:srgbClr val="212529"/>
+                          </a:solidFill>
+                          <a:latin typeface="Calibri"/>
+                        </a:rPr>
+                        <a:t>192.168.30.0/24</a:t>
+                      </a:r>
+                    </a:p>
+                  </a:txBody>
+                  <a:tcPr>
+                    <a:solidFill>
+                      <a:srgbClr val="EBF2FA"/>
+                    </a:solidFill>
+                  </a:tcPr>
+                </a:tc>
+              </a:tr>
+              <a:tr h="472440">
+                <a:tc>
+                  <a:txBody>
+                    <a:bodyPr/>
+                    <a:lstStyle/>
+                    <a:p>
+                      <a:r>
+                        <a:rPr sz="1200">
+                          <a:solidFill>
+                            <a:srgbClr val="212529"/>
+                          </a:solidFill>
+                          <a:latin typeface="Calibri"/>
+                        </a:rPr>
+                        <a:t>40</a:t>
+                      </a:r>
+                    </a:p>
+                  </a:txBody>
+                  <a:tcPr>
+                    <a:solidFill>
+                      <a:srgbClr val="FFFFFF"/>
+                    </a:solidFill>
+                  </a:tcPr>
+                </a:tc>
+                <a:tc>
+                  <a:txBody>
+                    <a:bodyPr/>
+                    <a:lstStyle/>
+                    <a:p>
+                      <a:r>
+                        <a:rPr sz="1200">
+                          <a:solidFill>
+                            <a:srgbClr val="212529"/>
+                          </a:solidFill>
+                          <a:latin typeface="Calibri"/>
+                        </a:rPr>
+                        <a:t>Services</a:t>
+                      </a:r>
+                    </a:p>
+                  </a:txBody>
+                  <a:tcPr>
+                    <a:solidFill>
+                      <a:srgbClr val="FFFFFF"/>
+                    </a:solidFill>
+                  </a:tcPr>
+                </a:tc>
+                <a:tc>
+                  <a:txBody>
+                    <a:bodyPr/>
+                    <a:lstStyle/>
+                    <a:p>
+                      <a:r>
+                        <a:rPr sz="1200">
+                          <a:solidFill>
+                            <a:srgbClr val="212529"/>
+                          </a:solidFill>
+                          <a:latin typeface="Calibri"/>
+                        </a:rPr>
+                        <a:t>Сервери / Принтери</a:t>
+                      </a:r>
+                    </a:p>
+                  </a:txBody>
+                  <a:tcPr>
+                    <a:solidFill>
+                      <a:srgbClr val="FFFFFF"/>
+                    </a:solidFill>
+                  </a:tcPr>
+                </a:tc>
+                <a:tc>
+                  <a:txBody>
+                    <a:bodyPr/>
+                    <a:lstStyle/>
+                    <a:p>
+                      <a:r>
+                        <a:rPr sz="1200">
+                          <a:solidFill>
+                            <a:srgbClr val="212529"/>
+                          </a:solidFill>
+                          <a:latin typeface="Calibri"/>
+                        </a:rPr>
+                        <a:t>192.168.40.0/24</a:t>
+                      </a:r>
+                    </a:p>
+                  </a:txBody>
+                  <a:tcPr>
+                    <a:solidFill>
+                      <a:srgbClr val="FFFFFF"/>
+                    </a:solidFill>
+                  </a:tcPr>
+                </a:tc>
+              </a:tr>
+              <a:tr h="472440">
+                <a:tc>
+                  <a:txBody>
+                    <a:bodyPr/>
+                    <a:lstStyle/>
+                    <a:p>
+                      <a:r>
+                        <a:rPr sz="1200">
+                          <a:solidFill>
+                            <a:srgbClr val="212529"/>
+                          </a:solidFill>
+                          <a:latin typeface="Calibri"/>
+                        </a:rPr>
+                        <a:t>99</a:t>
+                      </a:r>
+                    </a:p>
+                  </a:txBody>
+                  <a:tcPr>
+                    <a:solidFill>
+                      <a:srgbClr val="EBF2FA"/>
+                    </a:solidFill>
+                  </a:tcPr>
+                </a:tc>
+                <a:tc>
+                  <a:txBody>
+                    <a:bodyPr/>
+                    <a:lstStyle/>
+                    <a:p>
+                      <a:r>
+                        <a:rPr sz="1200">
+                          <a:solidFill>
+                            <a:srgbClr val="212529"/>
+                          </a:solidFill>
+                          <a:latin typeface="Calibri"/>
+                        </a:rPr>
+                        <a:t>Management</a:t>
+                      </a:r>
+                    </a:p>
+                  </a:txBody>
+                  <a:tcPr>
+                    <a:solidFill>
+                      <a:srgbClr val="EBF2FA"/>
+                    </a:solidFill>
+                  </a:tcPr>
+                </a:tc>
+                <a:tc>
+                  <a:txBody>
+                    <a:bodyPr/>
+                    <a:lstStyle/>
+                    <a:p>
+                      <a:r>
+                        <a:rPr sz="1200">
+                          <a:solidFill>
+                            <a:srgbClr val="212529"/>
+                          </a:solidFill>
+                          <a:latin typeface="Calibri"/>
+                        </a:rPr>
+                        <a:t>Управління обладнанням</a:t>
+                      </a:r>
+                    </a:p>
+                  </a:txBody>
+                  <a:tcPr>
+                    <a:solidFill>
+                      <a:srgbClr val="EBF2FA"/>
+                    </a:solidFill>
+                  </a:tcPr>
+                </a:tc>
+                <a:tc>
+                  <a:txBody>
+                    <a:bodyPr/>
+                    <a:lstStyle/>
+                    <a:p>
+                      <a:r>
+                        <a:rPr sz="1200">
+                          <a:solidFill>
+                            <a:srgbClr val="212529"/>
+                          </a:solidFill>
+                          <a:latin typeface="Calibri"/>
+                        </a:rPr>
+                        <a:t>192.168.99.0/24</a:t>
+                      </a:r>
+                    </a:p>
+                  </a:txBody>
+                  <a:tcPr>
+                    <a:solidFill>
+                      <a:srgbClr val="EBF2FA"/>
+                    </a:solidFill>
+                  </a:tcPr>
+                </a:tc>
+              </a:tr>
+            </a:tbl>
+          </a:graphicData>
+        </a:graphic>
+      </p:graphicFrame>
+      <p:sp>
+        <p:nvSpPr>
+          <p:cNvPr id="8" name="Rectangle 7"/>
+          <p:cNvSpPr/>
+          <p:nvPr/>
+        </p:nvSpPr>
+        <p:spPr>
+          <a:xfrm>
+            <a:off x="8046720" y="1234440"/>
+            <a:ext cx="3840480" cy="5303520"/>
+          </a:xfrm>
+          <a:prstGeom prst="rect">
+            <a:avLst/>
+          </a:prstGeom>
+          <a:solidFill>
+            <a:srgbClr val="F4F6F9"/>
+          </a:solidFill>
+          <a:ln w="19050">
+            <a:solidFill>
+              <a:srgbClr val="B0B8C4"/>
+            </a:solidFill>
+            <a:prstDash val="lgDash"/>
+          </a:ln>
+        </p:spPr>
+        <p:style>
+          <a:lnRef idx="1">
+            <a:schemeClr val="accent1"/>
+          </a:lnRef>
+          <a:fillRef idx="3">
+            <a:schemeClr val="accent1"/>
+          </a:fillRef>
+          <a:effectRef idx="2">
+            <a:schemeClr val="accent1"/>
+          </a:effectRef>
+          <a:fontRef idx="minor">
+            <a:schemeClr val="lt1"/>
+          </a:fontRef>
+        </p:style>
+        <p:txBody>
+          <a:bodyPr rtlCol="0" anchor="ctr"/>
+          <a:lstStyle/>
+          <a:p>
+            <a:pPr algn="ctr"/>
+          </a:p>
+        </p:txBody>
+      </p:sp>
+      <p:cxnSp>
+        <p:nvCxnSpPr>
+          <p:cNvPr id="9" name="Connector 8"/>
+          <p:cNvCxnSpPr/>
+          <p:nvPr/>
+        </p:nvCxnSpPr>
+        <p:spPr>
+          <a:xfrm>
+            <a:off x="8046720" y="1234440"/>
+            <a:ext cx="3840480" cy="5303520"/>
+          </a:xfrm>
+          <a:prstGeom prst="line">
+            <a:avLst/>
+          </a:prstGeom>
+          <a:ln w="9525">
+            <a:solidFill>
+              <a:srgbClr val="B0B8C4"/>
+            </a:solidFill>
+          </a:ln>
+        </p:spPr>
+        <p:style>
+          <a:lnRef idx="2">
+            <a:schemeClr val="accent1"/>
+          </a:lnRef>
+          <a:fillRef idx="0">
+            <a:schemeClr val="accent1"/>
+          </a:fillRef>
+          <a:effectRef idx="1">
+            <a:schemeClr val="accent1"/>
+          </a:effectRef>
+          <a:fontRef idx="minor">
+            <a:schemeClr val="tx1"/>
+          </a:fontRef>
+        </p:style>
+      </p:cxnSp>
+      <p:cxnSp>
+        <p:nvCxnSpPr>
+          <p:cNvPr id="10" name="Connector 9"/>
+          <p:cNvCxnSpPr/>
+          <p:nvPr/>
+        </p:nvCxnSpPr>
+        <p:spPr>
+          <a:xfrm flipH="1">
+            <a:off x="8046720" y="1234440"/>
+            <a:ext cx="3840480" cy="5303520"/>
+          </a:xfrm>
+          <a:prstGeom prst="line">
+            <a:avLst/>
+          </a:prstGeom>
+          <a:ln w="9525">
+            <a:solidFill>
+              <a:srgbClr val="B0B8C4"/>
+            </a:solidFill>
+          </a:ln>
+        </p:spPr>
+        <p:style>
+          <a:lnRef idx="2">
+            <a:schemeClr val="accent1"/>
+          </a:lnRef>
+          <a:fillRef idx="0">
+            <a:schemeClr val="accent1"/>
+          </a:fillRef>
+          <a:effectRef idx="1">
+            <a:schemeClr val="accent1"/>
+          </a:effectRef>
+          <a:fontRef idx="minor">
+            <a:schemeClr val="tx1"/>
+          </a:fontRef>
+        </p:style>
+      </p:cxnSp>
+      <p:sp>
+        <p:nvSpPr>
+          <p:cNvPr id="11" name="TextBox 10"/>
+          <p:cNvSpPr txBox="1"/>
+          <p:nvPr/>
+        </p:nvSpPr>
+        <p:spPr>
+          <a:xfrm>
+            <a:off x="8046720" y="3703320"/>
+            <a:ext cx="3840480" cy="365760"/>
           </a:xfrm>
           <a:prstGeom prst="rect">
             <a:avLst/>
@@ -6549,83 +7536,15 @@
           </a:bodyPr>
           <a:lstStyle/>
           <a:p>
-            <a:pPr algn="l">
-              <a:spcAft>
-                <a:spcPts val="600"/>
-              </a:spcAft>
-            </a:pPr>
-            <a:r>
-              <a:rPr sz="1200">
-                <a:solidFill>
-                  <a:srgbClr val="212529"/>
-                </a:solidFill>
-                <a:latin typeface="Calibri"/>
-              </a:rPr>
-              <a:t>•  Централізоване керування доступом до 20+ комутаторів</a:t>
-            </a:r>
-          </a:p>
-          <a:p>
-            <a:pPr algn="l">
-              <a:spcAft>
-                <a:spcPts val="600"/>
-              </a:spcAft>
-            </a:pPr>
-            <a:r>
-              <a:rPr sz="1200">
-                <a:solidFill>
-                  <a:srgbClr val="212529"/>
-                </a:solidFill>
-                <a:latin typeface="Calibri"/>
-              </a:rPr>
-              <a:t>•  Повне шифрування трафіку (на відміну від RADIUS)</a:t>
-            </a:r>
-          </a:p>
-          <a:p>
-            <a:pPr algn="l">
-              <a:spcAft>
-                <a:spcPts val="600"/>
-              </a:spcAft>
-            </a:pPr>
-            <a:r>
-              <a:rPr sz="1200">
-                <a:solidFill>
-                  <a:srgbClr val="212529"/>
-                </a:solidFill>
-                <a:latin typeface="Calibri"/>
-              </a:rPr>
-              <a:t>•  Розмежування прав: admin / operator / monitor</a:t>
-            </a:r>
-          </a:p>
-          <a:p>
-            <a:pPr algn="l">
-              <a:spcAft>
-                <a:spcPts val="600"/>
-              </a:spcAft>
-            </a:pPr>
-            <a:r>
-              <a:rPr sz="1200">
-                <a:solidFill>
-                  <a:srgbClr val="212529"/>
-                </a:solidFill>
-                <a:latin typeface="Calibri"/>
-              </a:rPr>
-              <a:t>•  Аудит дій адміністраторів</a:t>
-            </a:r>
-          </a:p>
-          <a:p>
-            <a:pPr algn="l">
-              <a:spcAft>
-                <a:spcPts val="600"/>
-              </a:spcAft>
-            </a:pPr>
-            <a:r>
-              <a:rPr sz="1200">
-                <a:solidFill>
-                  <a:srgbClr val="212529"/>
-                </a:solidFill>
-                <a:latin typeface="Calibri"/>
-              </a:rPr>
-              <a:t>•  Інтеграція з Cisco ISE 2.6</a:t>
+            <a:pPr algn="ctr"/>
+            <a:r>
+              <a:rPr sz="1400" i="1">
+                <a:solidFill>
+                  <a:srgbClr val="6C757D"/>
+                </a:solidFill>
+                <a:latin typeface="Calibri"/>
+              </a:rPr>
+              <a:t>Скриншот веб-інтерфейсу D-Link / схема VLAN</a:t>
             </a:r>
           </a:p>
         </p:txBody>
@@ -6742,7 +7661,7 @@
         </p:nvSpPr>
         <p:spPr>
           <a:xfrm>
-            <a:off x="457200" y="228600"/>
+            <a:off x="457200" y="201168"/>
             <a:ext cx="11247120" cy="640080"/>
           </a:xfrm>
           <a:prstGeom prst="rect">
@@ -6758,51 +7677,27 @@
           <a:p>
             <a:pPr algn="l"/>
             <a:r>
-              <a:rPr sz="2800" b="1">
+              <a:rPr sz="2800" b="1" i="0">
                 <a:solidFill>
                   <a:srgbClr val="FFFFFF"/>
                 </a:solidFill>
                 <a:latin typeface="Calibri"/>
               </a:rPr>
-              <a:t>Адміністрування, моніторинг і діагностика</a:t>
-            </a:r>
-          </a:p>
-        </p:txBody>
-      </p:sp>
-      <p:pic>
-        <p:nvPicPr>
-          <p:cNvPr id="5" name="Picture 4" descr="monitor.png"/>
-          <p:cNvPicPr>
-            <a:picLocks noChangeAspect="1"/>
-          </p:cNvPicPr>
-          <p:nvPr/>
-        </p:nvPicPr>
-        <p:blipFill>
-          <a:blip r:embed="rId2"/>
-          <a:stretch>
-            <a:fillRect/>
-          </a:stretch>
-        </p:blipFill>
-        <p:spPr>
-          <a:xfrm>
-            <a:off x="365760" y="1280160"/>
-            <a:ext cx="6858000" cy="3810000"/>
-          </a:xfrm>
-          <a:prstGeom prst="rect">
-            <a:avLst/>
-          </a:prstGeom>
-        </p:spPr>
-      </p:pic>
-      <p:sp>
-        <p:nvSpPr>
-          <p:cNvPr id="6" name="TextBox 5"/>
+              <a:t>Розділ 2.2. Дослідження технологій AAA та TACACS+</a:t>
+            </a:r>
+          </a:p>
+        </p:txBody>
+      </p:sp>
+      <p:sp>
+        <p:nvSpPr>
+          <p:cNvPr id="5" name="TextBox 4"/>
           <p:cNvSpPr txBox="1"/>
           <p:nvPr/>
         </p:nvSpPr>
         <p:spPr>
           <a:xfrm>
-            <a:off x="7589520" y="1371600"/>
-            <a:ext cx="4297680" cy="457200"/>
+            <a:off x="457200" y="1234440"/>
+            <a:ext cx="7315200" cy="457200"/>
           </a:xfrm>
           <a:prstGeom prst="rect">
             <a:avLst/>
@@ -6817,14 +7712,59 @@
           <a:p>
             <a:pPr algn="l"/>
             <a:r>
-              <a:rPr sz="1600" b="1">
+              <a:rPr sz="1800" b="1" i="0">
                 <a:solidFill>
                   <a:srgbClr val="204982"/>
                 </a:solidFill>
                 <a:latin typeface="Calibri"/>
               </a:rPr>
-              <a:t>Виконані операції</a:t>
-            </a:r>
+              <a:t>Модель AAA — три етапи контролю доступу</a:t>
+            </a:r>
+          </a:p>
+        </p:txBody>
+      </p:sp>
+      <p:sp>
+        <p:nvSpPr>
+          <p:cNvPr id="6" name="Rounded Rectangle 5"/>
+          <p:cNvSpPr/>
+          <p:nvPr/>
+        </p:nvSpPr>
+        <p:spPr>
+          <a:xfrm>
+            <a:off x="457200" y="1737360"/>
+            <a:ext cx="2468880" cy="2194560"/>
+          </a:xfrm>
+          <a:prstGeom prst="roundRect">
+            <a:avLst/>
+          </a:prstGeom>
+          <a:solidFill>
+            <a:srgbClr val="EBF2FA"/>
+          </a:solidFill>
+          <a:ln w="19050">
+            <a:solidFill>
+              <a:srgbClr val="36A2EB"/>
+            </a:solidFill>
+          </a:ln>
+        </p:spPr>
+        <p:style>
+          <a:lnRef idx="1">
+            <a:schemeClr val="accent1"/>
+          </a:lnRef>
+          <a:fillRef idx="3">
+            <a:schemeClr val="accent1"/>
+          </a:fillRef>
+          <a:effectRef idx="2">
+            <a:schemeClr val="accent1"/>
+          </a:effectRef>
+          <a:fontRef idx="minor">
+            <a:schemeClr val="lt1"/>
+          </a:fontRef>
+        </p:style>
+        <p:txBody>
+          <a:bodyPr rtlCol="0" anchor="ctr"/>
+          <a:lstStyle/>
+          <a:p>
+            <a:pPr algn="ctr"/>
           </a:p>
         </p:txBody>
       </p:sp>
@@ -6836,8 +7776,343 @@
         </p:nvSpPr>
         <p:spPr>
           <a:xfrm>
-            <a:off x="7589520" y="1828800"/>
-            <a:ext cx="4297680" cy="4572000"/>
+            <a:off x="640080" y="1828800"/>
+            <a:ext cx="2103120" cy="411480"/>
+          </a:xfrm>
+          <a:prstGeom prst="rect">
+            <a:avLst/>
+          </a:prstGeom>
+          <a:noFill/>
+        </p:spPr>
+        <p:txBody>
+          <a:bodyPr wrap="square" lIns="0" rIns="0" tIns="0" bIns="0">
+            <a:spAutoFit/>
+          </a:bodyPr>
+          <a:lstStyle/>
+          <a:p>
+            <a:pPr algn="l"/>
+            <a:r>
+              <a:rPr sz="1400" b="1" i="0">
+                <a:solidFill>
+                  <a:srgbClr val="36A2EB"/>
+                </a:solidFill>
+                <a:latin typeface="Calibri"/>
+              </a:rPr>
+              <a:t>Authentication</a:t>
+            </a:r>
+          </a:p>
+        </p:txBody>
+      </p:sp>
+      <p:sp>
+        <p:nvSpPr>
+          <p:cNvPr id="8" name="TextBox 7"/>
+          <p:cNvSpPr txBox="1"/>
+          <p:nvPr/>
+        </p:nvSpPr>
+        <p:spPr>
+          <a:xfrm>
+            <a:off x="640080" y="2240280"/>
+            <a:ext cx="2103120" cy="1645920"/>
+          </a:xfrm>
+          <a:prstGeom prst="rect">
+            <a:avLst/>
+          </a:prstGeom>
+          <a:noFill/>
+        </p:spPr>
+        <p:txBody>
+          <a:bodyPr wrap="square" lIns="0" rIns="0" tIns="0" bIns="0">
+            <a:spAutoFit/>
+          </a:bodyPr>
+          <a:lstStyle/>
+          <a:p>
+            <a:pPr algn="l"/>
+            <a:r>
+              <a:rPr sz="1100" b="0" i="0">
+                <a:solidFill>
+                  <a:srgbClr val="212529"/>
+                </a:solidFill>
+                <a:latin typeface="Calibri"/>
+              </a:rPr>
+              <a:t>Перевірка облікових даних користувача (логін і пароль) при спробі підключення до комутатора чи маршрутизатора.</a:t>
+            </a:r>
+          </a:p>
+        </p:txBody>
+      </p:sp>
+      <p:sp>
+        <p:nvSpPr>
+          <p:cNvPr id="9" name="Rounded Rectangle 8"/>
+          <p:cNvSpPr/>
+          <p:nvPr/>
+        </p:nvSpPr>
+        <p:spPr>
+          <a:xfrm>
+            <a:off x="3017520" y="1737360"/>
+            <a:ext cx="2468880" cy="2194560"/>
+          </a:xfrm>
+          <a:prstGeom prst="roundRect">
+            <a:avLst/>
+          </a:prstGeom>
+          <a:solidFill>
+            <a:srgbClr val="EBF2FA"/>
+          </a:solidFill>
+          <a:ln w="19050">
+            <a:solidFill>
+              <a:srgbClr val="F39C12"/>
+            </a:solidFill>
+          </a:ln>
+        </p:spPr>
+        <p:style>
+          <a:lnRef idx="1">
+            <a:schemeClr val="accent1"/>
+          </a:lnRef>
+          <a:fillRef idx="3">
+            <a:schemeClr val="accent1"/>
+          </a:fillRef>
+          <a:effectRef idx="2">
+            <a:schemeClr val="accent1"/>
+          </a:effectRef>
+          <a:fontRef idx="minor">
+            <a:schemeClr val="lt1"/>
+          </a:fontRef>
+        </p:style>
+        <p:txBody>
+          <a:bodyPr rtlCol="0" anchor="ctr"/>
+          <a:lstStyle/>
+          <a:p>
+            <a:pPr algn="ctr"/>
+          </a:p>
+        </p:txBody>
+      </p:sp>
+      <p:sp>
+        <p:nvSpPr>
+          <p:cNvPr id="10" name="TextBox 9"/>
+          <p:cNvSpPr txBox="1"/>
+          <p:nvPr/>
+        </p:nvSpPr>
+        <p:spPr>
+          <a:xfrm>
+            <a:off x="3200400" y="1828800"/>
+            <a:ext cx="2103120" cy="411480"/>
+          </a:xfrm>
+          <a:prstGeom prst="rect">
+            <a:avLst/>
+          </a:prstGeom>
+          <a:noFill/>
+        </p:spPr>
+        <p:txBody>
+          <a:bodyPr wrap="square" lIns="0" rIns="0" tIns="0" bIns="0">
+            <a:spAutoFit/>
+          </a:bodyPr>
+          <a:lstStyle/>
+          <a:p>
+            <a:pPr algn="l"/>
+            <a:r>
+              <a:rPr sz="1400" b="1" i="0">
+                <a:solidFill>
+                  <a:srgbClr val="F39C12"/>
+                </a:solidFill>
+                <a:latin typeface="Calibri"/>
+              </a:rPr>
+              <a:t>Authorization</a:t>
+            </a:r>
+          </a:p>
+        </p:txBody>
+      </p:sp>
+      <p:sp>
+        <p:nvSpPr>
+          <p:cNvPr id="11" name="TextBox 10"/>
+          <p:cNvSpPr txBox="1"/>
+          <p:nvPr/>
+        </p:nvSpPr>
+        <p:spPr>
+          <a:xfrm>
+            <a:off x="3200400" y="2240280"/>
+            <a:ext cx="2103120" cy="1645920"/>
+          </a:xfrm>
+          <a:prstGeom prst="rect">
+            <a:avLst/>
+          </a:prstGeom>
+          <a:noFill/>
+        </p:spPr>
+        <p:txBody>
+          <a:bodyPr wrap="square" lIns="0" rIns="0" tIns="0" bIns="0">
+            <a:spAutoFit/>
+          </a:bodyPr>
+          <a:lstStyle/>
+          <a:p>
+            <a:pPr algn="l"/>
+            <a:r>
+              <a:rPr sz="1100" b="0" i="0">
+                <a:solidFill>
+                  <a:srgbClr val="212529"/>
+                </a:solidFill>
+                <a:latin typeface="Calibri"/>
+              </a:rPr>
+              <a:t>Визначення переліку команд і дій, які дозволено виконувати конкретному адміністратору після успішного входу в систему.</a:t>
+            </a:r>
+          </a:p>
+        </p:txBody>
+      </p:sp>
+      <p:sp>
+        <p:nvSpPr>
+          <p:cNvPr id="12" name="Rounded Rectangle 11"/>
+          <p:cNvSpPr/>
+          <p:nvPr/>
+        </p:nvSpPr>
+        <p:spPr>
+          <a:xfrm>
+            <a:off x="5577840" y="1737360"/>
+            <a:ext cx="2468880" cy="2194560"/>
+          </a:xfrm>
+          <a:prstGeom prst="roundRect">
+            <a:avLst/>
+          </a:prstGeom>
+          <a:solidFill>
+            <a:srgbClr val="EBF2FA"/>
+          </a:solidFill>
+          <a:ln w="19050">
+            <a:solidFill>
+              <a:srgbClr val="27AE60"/>
+            </a:solidFill>
+          </a:ln>
+        </p:spPr>
+        <p:style>
+          <a:lnRef idx="1">
+            <a:schemeClr val="accent1"/>
+          </a:lnRef>
+          <a:fillRef idx="3">
+            <a:schemeClr val="accent1"/>
+          </a:fillRef>
+          <a:effectRef idx="2">
+            <a:schemeClr val="accent1"/>
+          </a:effectRef>
+          <a:fontRef idx="minor">
+            <a:schemeClr val="lt1"/>
+          </a:fontRef>
+        </p:style>
+        <p:txBody>
+          <a:bodyPr rtlCol="0" anchor="ctr"/>
+          <a:lstStyle/>
+          <a:p>
+            <a:pPr algn="ctr"/>
+          </a:p>
+        </p:txBody>
+      </p:sp>
+      <p:sp>
+        <p:nvSpPr>
+          <p:cNvPr id="13" name="TextBox 12"/>
+          <p:cNvSpPr txBox="1"/>
+          <p:nvPr/>
+        </p:nvSpPr>
+        <p:spPr>
+          <a:xfrm>
+            <a:off x="5760720" y="1828800"/>
+            <a:ext cx="2103120" cy="411480"/>
+          </a:xfrm>
+          <a:prstGeom prst="rect">
+            <a:avLst/>
+          </a:prstGeom>
+          <a:noFill/>
+        </p:spPr>
+        <p:txBody>
+          <a:bodyPr wrap="square" lIns="0" rIns="0" tIns="0" bIns="0">
+            <a:spAutoFit/>
+          </a:bodyPr>
+          <a:lstStyle/>
+          <a:p>
+            <a:pPr algn="l"/>
+            <a:r>
+              <a:rPr sz="1400" b="1" i="0">
+                <a:solidFill>
+                  <a:srgbClr val="27AE60"/>
+                </a:solidFill>
+                <a:latin typeface="Calibri"/>
+              </a:rPr>
+              <a:t>Accounting</a:t>
+            </a:r>
+          </a:p>
+        </p:txBody>
+      </p:sp>
+      <p:sp>
+        <p:nvSpPr>
+          <p:cNvPr id="14" name="TextBox 13"/>
+          <p:cNvSpPr txBox="1"/>
+          <p:nvPr/>
+        </p:nvSpPr>
+        <p:spPr>
+          <a:xfrm>
+            <a:off x="5760720" y="2240280"/>
+            <a:ext cx="2103120" cy="1645920"/>
+          </a:xfrm>
+          <a:prstGeom prst="rect">
+            <a:avLst/>
+          </a:prstGeom>
+          <a:noFill/>
+        </p:spPr>
+        <p:txBody>
+          <a:bodyPr wrap="square" lIns="0" rIns="0" tIns="0" bIns="0">
+            <a:spAutoFit/>
+          </a:bodyPr>
+          <a:lstStyle/>
+          <a:p>
+            <a:pPr algn="l"/>
+            <a:r>
+              <a:rPr sz="1100" b="0" i="0">
+                <a:solidFill>
+                  <a:srgbClr val="212529"/>
+                </a:solidFill>
+                <a:latin typeface="Calibri"/>
+              </a:rPr>
+              <a:t>Фіксація всіх дій користувача в системі. Дозволяє відстежувати зміни конфігурації та проводити аудит у разі несправностей.</a:t>
+            </a:r>
+          </a:p>
+        </p:txBody>
+      </p:sp>
+      <p:sp>
+        <p:nvSpPr>
+          <p:cNvPr id="15" name="TextBox 14"/>
+          <p:cNvSpPr txBox="1"/>
+          <p:nvPr/>
+        </p:nvSpPr>
+        <p:spPr>
+          <a:xfrm>
+            <a:off x="457200" y="4114800"/>
+            <a:ext cx="7772400" cy="457200"/>
+          </a:xfrm>
+          <a:prstGeom prst="rect">
+            <a:avLst/>
+          </a:prstGeom>
+          <a:noFill/>
+        </p:spPr>
+        <p:txBody>
+          <a:bodyPr wrap="square" lIns="0" rIns="0" tIns="0" bIns="0">
+            <a:spAutoFit/>
+          </a:bodyPr>
+          <a:lstStyle/>
+          <a:p>
+            <a:pPr algn="l"/>
+            <a:r>
+              <a:rPr sz="1800" b="1" i="0">
+                <a:solidFill>
+                  <a:srgbClr val="204982"/>
+                </a:solidFill>
+                <a:latin typeface="Calibri"/>
+              </a:rPr>
+              <a:t>Навіщо потрібен TACACS+</a:t>
+            </a:r>
+          </a:p>
+        </p:txBody>
+      </p:sp>
+      <p:sp>
+        <p:nvSpPr>
+          <p:cNvPr id="16" name="TextBox 15"/>
+          <p:cNvSpPr txBox="1"/>
+          <p:nvPr/>
+        </p:nvSpPr>
+        <p:spPr>
+          <a:xfrm>
+            <a:off x="457200" y="4572000"/>
+            <a:ext cx="7772400" cy="2011680"/>
           </a:xfrm>
           <a:prstGeom prst="rect">
             <a:avLst/>
@@ -6852,7 +8127,7 @@
           <a:p>
             <a:pPr algn="l">
               <a:spcAft>
-                <a:spcPts val="600"/>
+                <a:spcPts val="800"/>
               </a:spcAft>
             </a:pPr>
             <a:r>
@@ -6862,13 +8137,13 @@
                 </a:solidFill>
                 <a:latin typeface="Calibri"/>
               </a:rPr>
-              <a:t>•  Перевірка таблиць VLAN та MAC-адрес</a:t>
+              <a:t>•  Централізоване керування: один обліковий запис для всіх 20+ комутаторів гуртожитку</a:t>
             </a:r>
           </a:p>
           <a:p>
             <a:pPr algn="l">
               <a:spcAft>
-                <a:spcPts val="600"/>
+                <a:spcPts val="800"/>
               </a:spcAft>
             </a:pPr>
             <a:r>
@@ -6878,13 +8153,13 @@
                 </a:solidFill>
                 <a:latin typeface="Calibri"/>
               </a:rPr>
-              <a:t>•  Аналіз DHCP, NAT, таблиць маршрутизації</a:t>
+              <a:t>•  Повне шифрування трафіку між комутатором і сервером (на відміну від RADIUS)</a:t>
             </a:r>
           </a:p>
           <a:p>
             <a:pPr algn="l">
               <a:spcAft>
-                <a:spcPts val="600"/>
+                <a:spcPts val="800"/>
               </a:spcAft>
             </a:pPr>
             <a:r>
@@ -6894,13 +8169,13 @@
                 </a:solidFill>
                 <a:latin typeface="Calibri"/>
               </a:rPr>
-              <a:t>•  Перегляд активних підключень у RouterOS</a:t>
+              <a:t>•  Розмежування прав: окремі рівні для admin, operator та monitor</a:t>
             </a:r>
           </a:p>
           <a:p>
             <a:pPr algn="l">
               <a:spcAft>
-                <a:spcPts val="600"/>
+                <a:spcPts val="800"/>
               </a:spcAft>
             </a:pPr>
             <a:r>
@@ -6910,39 +8185,158 @@
                 </a:solidFill>
                 <a:latin typeface="Calibri"/>
               </a:rPr>
-              <a:t>•  Діагностика втрати зв'язку (гуртожиток №10)</a:t>
-            </a:r>
-          </a:p>
-          <a:p>
-            <a:pPr algn="l">
-              <a:spcAft>
-                <a:spcPts val="600"/>
-              </a:spcAft>
-            </a:pPr>
-            <a:r>
-              <a:rPr sz="1200">
-                <a:solidFill>
-                  <a:srgbClr val="212529"/>
-                </a:solidFill>
-                <a:latin typeface="Calibri"/>
-              </a:rPr>
-              <a:t>•  Тестування ping після зміни конфігурацій</a:t>
-            </a:r>
-          </a:p>
-          <a:p>
-            <a:pPr algn="l">
-              <a:spcAft>
-                <a:spcPts val="600"/>
-              </a:spcAft>
-            </a:pPr>
-            <a:r>
-              <a:rPr sz="1200">
-                <a:solidFill>
-                  <a:srgbClr val="212529"/>
-                </a:solidFill>
-                <a:latin typeface="Calibri"/>
-              </a:rPr>
-              <a:t>•  Контроль навантаження на DGS-1210</a:t>
+              <a:t>•  Інтеграція із сервером Cisco ISE 2.6 і ведення журналу обліку дій</a:t>
+            </a:r>
+          </a:p>
+        </p:txBody>
+      </p:sp>
+      <p:sp>
+        <p:nvSpPr>
+          <p:cNvPr id="17" name="Rectangle 16"/>
+          <p:cNvSpPr/>
+          <p:nvPr/>
+        </p:nvSpPr>
+        <p:spPr>
+          <a:xfrm>
+            <a:off x="8321040" y="1234440"/>
+            <a:ext cx="3566160" cy="5303520"/>
+          </a:xfrm>
+          <a:prstGeom prst="rect">
+            <a:avLst/>
+          </a:prstGeom>
+          <a:solidFill>
+            <a:srgbClr val="F4F6F9"/>
+          </a:solidFill>
+          <a:ln w="19050">
+            <a:solidFill>
+              <a:srgbClr val="B0B8C4"/>
+            </a:solidFill>
+            <a:prstDash val="lgDash"/>
+          </a:ln>
+        </p:spPr>
+        <p:style>
+          <a:lnRef idx="1">
+            <a:schemeClr val="accent1"/>
+          </a:lnRef>
+          <a:fillRef idx="3">
+            <a:schemeClr val="accent1"/>
+          </a:fillRef>
+          <a:effectRef idx="2">
+            <a:schemeClr val="accent1"/>
+          </a:effectRef>
+          <a:fontRef idx="minor">
+            <a:schemeClr val="lt1"/>
+          </a:fontRef>
+        </p:style>
+        <p:txBody>
+          <a:bodyPr rtlCol="0" anchor="ctr"/>
+          <a:lstStyle/>
+          <a:p>
+            <a:pPr algn="ctr"/>
+          </a:p>
+        </p:txBody>
+      </p:sp>
+      <p:cxnSp>
+        <p:nvCxnSpPr>
+          <p:cNvPr id="18" name="Connector 17"/>
+          <p:cNvCxnSpPr/>
+          <p:nvPr/>
+        </p:nvCxnSpPr>
+        <p:spPr>
+          <a:xfrm>
+            <a:off x="8321040" y="1234440"/>
+            <a:ext cx="3566160" cy="5303520"/>
+          </a:xfrm>
+          <a:prstGeom prst="line">
+            <a:avLst/>
+          </a:prstGeom>
+          <a:ln w="9525">
+            <a:solidFill>
+              <a:srgbClr val="B0B8C4"/>
+            </a:solidFill>
+          </a:ln>
+        </p:spPr>
+        <p:style>
+          <a:lnRef idx="2">
+            <a:schemeClr val="accent1"/>
+          </a:lnRef>
+          <a:fillRef idx="0">
+            <a:schemeClr val="accent1"/>
+          </a:fillRef>
+          <a:effectRef idx="1">
+            <a:schemeClr val="accent1"/>
+          </a:effectRef>
+          <a:fontRef idx="minor">
+            <a:schemeClr val="tx1"/>
+          </a:fontRef>
+        </p:style>
+      </p:cxnSp>
+      <p:cxnSp>
+        <p:nvCxnSpPr>
+          <p:cNvPr id="19" name="Connector 18"/>
+          <p:cNvCxnSpPr/>
+          <p:nvPr/>
+        </p:nvCxnSpPr>
+        <p:spPr>
+          <a:xfrm flipH="1">
+            <a:off x="8321040" y="1234440"/>
+            <a:ext cx="3566160" cy="5303520"/>
+          </a:xfrm>
+          <a:prstGeom prst="line">
+            <a:avLst/>
+          </a:prstGeom>
+          <a:ln w="9525">
+            <a:solidFill>
+              <a:srgbClr val="B0B8C4"/>
+            </a:solidFill>
+          </a:ln>
+        </p:spPr>
+        <p:style>
+          <a:lnRef idx="2">
+            <a:schemeClr val="accent1"/>
+          </a:lnRef>
+          <a:fillRef idx="0">
+            <a:schemeClr val="accent1"/>
+          </a:fillRef>
+          <a:effectRef idx="1">
+            <a:schemeClr val="accent1"/>
+          </a:effectRef>
+          <a:fontRef idx="minor">
+            <a:schemeClr val="tx1"/>
+          </a:fontRef>
+        </p:style>
+      </p:cxnSp>
+      <p:sp>
+        <p:nvSpPr>
+          <p:cNvPr id="20" name="TextBox 19"/>
+          <p:cNvSpPr txBox="1"/>
+          <p:nvPr/>
+        </p:nvSpPr>
+        <p:spPr>
+          <a:xfrm>
+            <a:off x="8321040" y="3703320"/>
+            <a:ext cx="3566160" cy="365760"/>
+          </a:xfrm>
+          <a:prstGeom prst="rect">
+            <a:avLst/>
+          </a:prstGeom>
+          <a:noFill/>
+        </p:spPr>
+        <p:txBody>
+          <a:bodyPr wrap="square">
+            <a:spAutoFit/>
+          </a:bodyPr>
+          <a:lstStyle/>
+          <a:p>
+            <a:pPr algn="ctr"/>
+            <a:r>
+              <a:rPr sz="1400" i="1">
+                <a:solidFill>
+                  <a:srgbClr val="6C757D"/>
+                </a:solidFill>
+                <a:latin typeface="Calibri"/>
+              </a:rPr>
+              <a:t>Схема AAA + TACACS+ / Cisco ISE</a:t>
             </a:r>
           </a:p>
         </p:txBody>
@@ -7059,7 +8453,7 @@
         </p:nvSpPr>
         <p:spPr>
           <a:xfrm>
-            <a:off x="457200" y="228600"/>
+            <a:off x="457200" y="201168"/>
             <a:ext cx="11247120" cy="640080"/>
           </a:xfrm>
           <a:prstGeom prst="rect">
@@ -7075,7 +8469,7 @@
           <a:p>
             <a:pPr algn="l"/>
             <a:r>
-              <a:rPr sz="2800" b="1">
+              <a:rPr sz="2800" b="1" i="0">
                 <a:solidFill>
                   <a:srgbClr val="FFFFFF"/>
                 </a:solidFill>
@@ -7086,40 +8480,16 @@
           </a:p>
         </p:txBody>
       </p:sp>
-      <p:pic>
-        <p:nvPicPr>
-          <p:cNvPr id="5" name="Picture 4" descr="tasks.png"/>
-          <p:cNvPicPr>
-            <a:picLocks noChangeAspect="1"/>
-          </p:cNvPicPr>
-          <p:nvPr/>
-        </p:nvPicPr>
-        <p:blipFill>
-          <a:blip r:embed="rId2"/>
-          <a:stretch>
-            <a:fillRect/>
-          </a:stretch>
-        </p:blipFill>
-        <p:spPr>
-          <a:xfrm>
-            <a:off x="365760" y="1280160"/>
-            <a:ext cx="8229600" cy="5029200"/>
-          </a:xfrm>
-          <a:prstGeom prst="rect">
-            <a:avLst/>
-          </a:prstGeom>
-        </p:spPr>
-      </p:pic>
-      <p:sp>
-        <p:nvSpPr>
-          <p:cNvPr id="6" name="TextBox 5"/>
+      <p:sp>
+        <p:nvSpPr>
+          <p:cNvPr id="5" name="TextBox 4"/>
           <p:cNvSpPr txBox="1"/>
           <p:nvPr/>
         </p:nvSpPr>
         <p:spPr>
           <a:xfrm>
-            <a:off x="8046720" y="1371600"/>
-            <a:ext cx="3931920" cy="457200"/>
+            <a:off x="457200" y="1234440"/>
+            <a:ext cx="7772400" cy="457200"/>
           </a:xfrm>
           <a:prstGeom prst="rect">
             <a:avLst/>
@@ -7134,27 +8504,27 @@
           <a:p>
             <a:pPr algn="l"/>
             <a:r>
-              <a:rPr sz="1600" b="1">
+              <a:rPr sz="1800" b="1" i="0">
                 <a:solidFill>
                   <a:srgbClr val="204982"/>
                 </a:solidFill>
                 <a:latin typeface="Calibri"/>
               </a:rPr>
-              <a:t>Ключові досягнення</a:t>
-            </a:r>
-          </a:p>
-        </p:txBody>
-      </p:sp>
-      <p:sp>
-        <p:nvSpPr>
-          <p:cNvPr id="7" name="TextBox 6"/>
+              <a:t>Основні досягнення під час практики</a:t>
+            </a:r>
+          </a:p>
+        </p:txBody>
+      </p:sp>
+      <p:sp>
+        <p:nvSpPr>
+          <p:cNvPr id="6" name="TextBox 5"/>
           <p:cNvSpPr txBox="1"/>
           <p:nvPr/>
         </p:nvSpPr>
         <p:spPr>
           <a:xfrm>
-            <a:off x="8046720" y="1828800"/>
-            <a:ext cx="3931920" cy="4572000"/>
+            <a:off x="457200" y="1737360"/>
+            <a:ext cx="7772400" cy="5029200"/>
           </a:xfrm>
           <a:prstGeom prst="rect">
             <a:avLst/>
@@ -7169,113 +8539,280 @@
           <a:p>
             <a:pPr algn="l">
               <a:spcAft>
-                <a:spcPts val="600"/>
+                <a:spcPts val="800"/>
               </a:spcAft>
             </a:pPr>
             <a:r>
-              <a:rPr sz="1200">
+              <a:rPr sz="1300">
                 <a:solidFill>
                   <a:srgbClr val="212529"/>
                 </a:solidFill>
                 <a:latin typeface="Calibri"/>
               </a:rPr>
-              <a:t>•  ПЗО.1 — Робота в технічній команді</a:t>
+              <a:t>•  ПЗО.1 — у складі технічної команди брав участь в усуненні аварійного відключення маршрутизатора у гуртожитку №10</a:t>
             </a:r>
           </a:p>
           <a:p>
             <a:pPr algn="l">
               <a:spcAft>
-                <a:spcPts val="600"/>
+                <a:spcPts val="800"/>
               </a:spcAft>
             </a:pPr>
             <a:r>
-              <a:rPr sz="1200">
+              <a:rPr sz="1300">
                 <a:solidFill>
                   <a:srgbClr val="212529"/>
                 </a:solidFill>
                 <a:latin typeface="Calibri"/>
               </a:rPr>
-              <a:t>•  ПЗО.2 — Аналіз показників мережі</a:t>
+              <a:t>•  ПЗО.2 — провів аналіз стану мережевого обладнання та оцінку показників роботи мережі</a:t>
             </a:r>
           </a:p>
           <a:p>
             <a:pPr algn="l">
               <a:spcAft>
-                <a:spcPts val="600"/>
+                <a:spcPts val="800"/>
               </a:spcAft>
             </a:pPr>
             <a:r>
-              <a:rPr sz="1200">
+              <a:rPr sz="1300">
                 <a:solidFill>
                   <a:srgbClr val="212529"/>
                 </a:solidFill>
                 <a:latin typeface="Calibri"/>
               </a:rPr>
-              <a:t>•  ПЗО.3 — Висновок щодо резервного живлення</a:t>
+              <a:t>•  ПЗО.3 — підготував технічний висновок щодо необхідності резервних блоків живлення</a:t>
             </a:r>
           </a:p>
           <a:p>
             <a:pPr algn="l">
               <a:spcAft>
-                <a:spcPts val="600"/>
+                <a:spcPts val="800"/>
               </a:spcAft>
             </a:pPr>
             <a:r>
-              <a:rPr sz="1200">
+              <a:rPr sz="1300">
                 <a:solidFill>
                   <a:srgbClr val="212529"/>
                 </a:solidFill>
                 <a:latin typeface="Calibri"/>
               </a:rPr>
-              <a:t>•  ПЗО.5 — Тестування конфігурацій</a:t>
+              <a:t>•  ПЗО.5 — надавав допомогу в тестуванні нових конфігурацій та діагностиці конфліктів IP-адрес</a:t>
             </a:r>
           </a:p>
           <a:p>
             <a:pPr algn="l">
               <a:spcAft>
-                <a:spcPts val="600"/>
+                <a:spcPts val="800"/>
               </a:spcAft>
             </a:pPr>
             <a:r>
-              <a:rPr sz="1200">
+              <a:rPr sz="1300">
                 <a:solidFill>
                   <a:srgbClr val="212529"/>
                 </a:solidFill>
                 <a:latin typeface="Calibri"/>
               </a:rPr>
-              <a:t>•  ПЗО.7 — Збір даних через Google Форми</a:t>
+              <a:t>•  ПЗО.6 — брав участь у складанні кошторису на модернізацію та заміну обладнання</a:t>
             </a:r>
           </a:p>
           <a:p>
             <a:pPr algn="l">
               <a:spcAft>
-                <a:spcPts val="600"/>
+                <a:spcPts val="800"/>
               </a:spcAft>
             </a:pPr>
             <a:r>
-              <a:rPr sz="1200">
+              <a:rPr sz="1300">
                 <a:solidFill>
                   <a:srgbClr val="212529"/>
                 </a:solidFill>
                 <a:latin typeface="Calibri"/>
               </a:rPr>
-              <a:t>•  ПЗО.8 — Таблиці сумісності Proline</a:t>
+              <a:t>•  ПЗО.7 — здійснював збір та систематизацію звернень користувачів через Google Форми</a:t>
             </a:r>
           </a:p>
           <a:p>
             <a:pPr algn="l">
               <a:spcAft>
-                <a:spcPts val="600"/>
+                <a:spcPts val="800"/>
               </a:spcAft>
             </a:pPr>
             <a:r>
-              <a:rPr sz="1200">
+              <a:rPr sz="1300">
                 <a:solidFill>
                   <a:srgbClr val="212529"/>
                 </a:solidFill>
                 <a:latin typeface="Calibri"/>
               </a:rPr>
-              <a:t>•  ПЗО.9 — VLAN та AAA / TACACS+</a:t>
+              <a:t>•  ПЗО.8 — сформував таблиці сумісності блоків живлення Proline для DGS-1210 та DES-1000/2000</a:t>
+            </a:r>
+          </a:p>
+          <a:p>
+            <a:pPr algn="l">
+              <a:spcAft>
+                <a:spcPts val="800"/>
+              </a:spcAft>
+            </a:pPr>
+            <a:r>
+              <a:rPr sz="1300">
+                <a:solidFill>
+                  <a:srgbClr val="212529"/>
+                </a:solidFill>
+                <a:latin typeface="Calibri"/>
+              </a:rPr>
+              <a:t>•  ПЗО.9 — налаштовував керовані комутатори D-Link, впровадив сегментацію VLAN та систему AAA на базі TACACS+</a:t>
+            </a:r>
+          </a:p>
+        </p:txBody>
+      </p:sp>
+      <p:sp>
+        <p:nvSpPr>
+          <p:cNvPr id="7" name="Rectangle 6"/>
+          <p:cNvSpPr/>
+          <p:nvPr/>
+        </p:nvSpPr>
+        <p:spPr>
+          <a:xfrm>
+            <a:off x="8503920" y="1234440"/>
+            <a:ext cx="3383280" cy="5303520"/>
+          </a:xfrm>
+          <a:prstGeom prst="rect">
+            <a:avLst/>
+          </a:prstGeom>
+          <a:solidFill>
+            <a:srgbClr val="F4F6F9"/>
+          </a:solidFill>
+          <a:ln w="19050">
+            <a:solidFill>
+              <a:srgbClr val="B0B8C4"/>
+            </a:solidFill>
+            <a:prstDash val="lgDash"/>
+          </a:ln>
+        </p:spPr>
+        <p:style>
+          <a:lnRef idx="1">
+            <a:schemeClr val="accent1"/>
+          </a:lnRef>
+          <a:fillRef idx="3">
+            <a:schemeClr val="accent1"/>
+          </a:fillRef>
+          <a:effectRef idx="2">
+            <a:schemeClr val="accent1"/>
+          </a:effectRef>
+          <a:fontRef idx="minor">
+            <a:schemeClr val="lt1"/>
+          </a:fontRef>
+        </p:style>
+        <p:txBody>
+          <a:bodyPr rtlCol="0" anchor="ctr"/>
+          <a:lstStyle/>
+          <a:p>
+            <a:pPr algn="ctr"/>
+          </a:p>
+        </p:txBody>
+      </p:sp>
+      <p:cxnSp>
+        <p:nvCxnSpPr>
+          <p:cNvPr id="8" name="Connector 7"/>
+          <p:cNvCxnSpPr/>
+          <p:nvPr/>
+        </p:nvCxnSpPr>
+        <p:spPr>
+          <a:xfrm>
+            <a:off x="8503920" y="1234440"/>
+            <a:ext cx="3383280" cy="5303520"/>
+          </a:xfrm>
+          <a:prstGeom prst="line">
+            <a:avLst/>
+          </a:prstGeom>
+          <a:ln w="9525">
+            <a:solidFill>
+              <a:srgbClr val="B0B8C4"/>
+            </a:solidFill>
+          </a:ln>
+        </p:spPr>
+        <p:style>
+          <a:lnRef idx="2">
+            <a:schemeClr val="accent1"/>
+          </a:lnRef>
+          <a:fillRef idx="0">
+            <a:schemeClr val="accent1"/>
+          </a:fillRef>
+          <a:effectRef idx="1">
+            <a:schemeClr val="accent1"/>
+          </a:effectRef>
+          <a:fontRef idx="minor">
+            <a:schemeClr val="tx1"/>
+          </a:fontRef>
+        </p:style>
+      </p:cxnSp>
+      <p:cxnSp>
+        <p:nvCxnSpPr>
+          <p:cNvPr id="9" name="Connector 8"/>
+          <p:cNvCxnSpPr/>
+          <p:nvPr/>
+        </p:nvCxnSpPr>
+        <p:spPr>
+          <a:xfrm flipH="1">
+            <a:off x="8503920" y="1234440"/>
+            <a:ext cx="3383280" cy="5303520"/>
+          </a:xfrm>
+          <a:prstGeom prst="line">
+            <a:avLst/>
+          </a:prstGeom>
+          <a:ln w="9525">
+            <a:solidFill>
+              <a:srgbClr val="B0B8C4"/>
+            </a:solidFill>
+          </a:ln>
+        </p:spPr>
+        <p:style>
+          <a:lnRef idx="2">
+            <a:schemeClr val="accent1"/>
+          </a:lnRef>
+          <a:fillRef idx="0">
+            <a:schemeClr val="accent1"/>
+          </a:fillRef>
+          <a:effectRef idx="1">
+            <a:schemeClr val="accent1"/>
+          </a:effectRef>
+          <a:fontRef idx="minor">
+            <a:schemeClr val="tx1"/>
+          </a:fontRef>
+        </p:style>
+      </p:cxnSp>
+      <p:sp>
+        <p:nvSpPr>
+          <p:cNvPr id="10" name="TextBox 9"/>
+          <p:cNvSpPr txBox="1"/>
+          <p:nvPr/>
+        </p:nvSpPr>
+        <p:spPr>
+          <a:xfrm>
+            <a:off x="8503920" y="3703320"/>
+            <a:ext cx="3383280" cy="365760"/>
+          </a:xfrm>
+          <a:prstGeom prst="rect">
+            <a:avLst/>
+          </a:prstGeom>
+          <a:noFill/>
+        </p:spPr>
+        <p:txBody>
+          <a:bodyPr wrap="square">
+            <a:spAutoFit/>
+          </a:bodyPr>
+          <a:lstStyle/>
+          <a:p>
+            <a:pPr algn="ctr"/>
+            <a:r>
+              <a:rPr sz="1400" i="1">
+                <a:solidFill>
+                  <a:srgbClr val="6C757D"/>
+                </a:solidFill>
+                <a:latin typeface="Calibri"/>
+              </a:rPr>
+              <a:t>Фото з робочого процесу / чек-лист</a:t>
             </a:r>
           </a:p>
         </p:txBody>
